--- a/HumanDetection_PitchDeck.pptx
+++ b/HumanDetection_PitchDeck.pptx
@@ -4,18 +4,16 @@
   <p:sldMasterIdLst>
     <p:sldMasterId id="2147483648" r:id="rId1"/>
   </p:sldMasterIdLst>
+  <p:notesMasterIdLst>
+    <p:notesMasterId r:id="rId6"/>
+  </p:notesMasterIdLst>
   <p:sldIdLst>
     <p:sldId id="256" r:id="rId2"/>
     <p:sldId id="257" r:id="rId3"/>
-    <p:sldId id="258" r:id="rId4"/>
-    <p:sldId id="259" r:id="rId5"/>
-    <p:sldId id="260" r:id="rId6"/>
-    <p:sldId id="261" r:id="rId7"/>
+    <p:sldId id="259" r:id="rId4"/>
+    <p:sldId id="260" r:id="rId5"/>
   </p:sldIdLst>
-  <p:notesMasterIdLst>
-    <p:notesMasterId r:id="rId8"/>
-  </p:notesMasterIdLst>
-  <p:sldSz cx="9144000" cy="5143500"/>
+  <p:sldSz cx="9144000" cy="5143500" type="screen16x9"/>
   <p:notesSz cx="5143500" cy="9144000"/>
   <p:defaultTextStyle>
     <a:lvl1pPr marL="0" algn="l" defTabSz="914400" rtl="0" eaLnBrk="1" latinLnBrk="0" hangingPunct="1">
@@ -109,6 +107,11 @@
       </a:defRPr>
     </a:lvl9pPr>
   </p:defaultTextStyle>
+  <p:extLst>
+    <p:ext uri="{EFAFB233-063F-42B5-8137-9DF3F51BA10A}">
+      <p15:sldGuideLst xmlns:p15="http://schemas.microsoft.com/office/powerpoint/2012/main"/>
+    </p:ext>
+  </p:extLst>
 </p:presentation>
 </file>
 
@@ -134,234 +137,10 @@
           <a:chExt cx="0" cy="0"/>
         </a:xfrm>
       </p:grpSpPr>
-      <p:sp>
-        <p:nvSpPr>
-          <p:cNvPr id="2" name="Header Placeholder 1"/>
-          <p:cNvSpPr>
-            <a:spLocks noGrp="1"/>
-          </p:cNvSpPr>
-          <p:nvPr>
-            <p:ph type="hdr" sz="quarter"/>
-          </p:nvPr>
-        </p:nvSpPr>
-        <p:spPr>
-          <a:xfrm>
-            <a:off x="0" y="0"/>
-            <a:ext cx="2971800" cy="458788"/>
-          </a:xfrm>
-          <a:prstGeom prst="rect">
-            <a:avLst/>
-          </a:prstGeom>
-        </p:spPr>
-        <p:txBody>
-          <a:bodyPr vert="horz" lIns="91440" tIns="45720" rIns="91440" bIns="45720" rtlCol="0"/>
-          <a:lstStyle>
-            <a:lvl1pPr algn="l">
-              <a:defRPr sz="1200"/>
-            </a:lvl1pPr>
-          </a:lstStyle>
-          <a:p>
-            <a:endParaRPr lang="en-US"/>
-          </a:p>
-        </p:txBody>
-      </p:sp>
-      <p:sp>
-        <p:nvSpPr>
-          <p:cNvPr id="3" name="Date Placeholder 2"/>
-          <p:cNvSpPr>
-            <a:spLocks noGrp="1"/>
-          </p:cNvSpPr>
-          <p:nvPr>
-            <p:ph type="dt" idx="1"/>
-          </p:nvPr>
-        </p:nvSpPr>
-        <p:spPr>
-          <a:xfrm>
-            <a:off x="3884613" y="0"/>
-            <a:ext cx="2971800" cy="458788"/>
-          </a:xfrm>
-          <a:prstGeom prst="rect">
-            <a:avLst/>
-          </a:prstGeom>
-        </p:spPr>
-        <p:txBody>
-          <a:bodyPr vert="horz" lIns="91440" tIns="45720" rIns="91440" bIns="45720" rtlCol="0"/>
-          <a:lstStyle>
-            <a:lvl1pPr algn="r">
-              <a:defRPr sz="1200"/>
-            </a:lvl1pPr>
-          </a:lstStyle>
-          <a:p>
-            <a:fld id="{5282F153-3F37-0F45-9E97-73ACFA13230C}" type="datetimeFigureOut">
-              <a:rPr lang="en-US"/>
-              <a:t>7/23/19</a:t>
-            </a:fld>
-            <a:endParaRPr lang="en-US"/>
-          </a:p>
-        </p:txBody>
-      </p:sp>
-      <p:sp>
-        <p:nvSpPr>
-          <p:cNvPr id="4" name="Slide Image Placeholder 3"/>
-          <p:cNvSpPr>
-            <a:spLocks noGrp="1" noRot="1" noChangeAspect="1"/>
-          </p:cNvSpPr>
-          <p:nvPr>
-            <p:ph type="sldImg" idx="2"/>
-          </p:nvPr>
-        </p:nvSpPr>
-        <p:spPr>
-          <a:xfrm>
-            <a:off x="685800" y="1143000"/>
-            <a:ext cx="5486400" cy="3086100"/>
-          </a:xfrm>
-          <a:prstGeom prst="rect">
-            <a:avLst/>
-          </a:prstGeom>
-          <a:noFill/>
-          <a:ln w="12700">
-            <a:solidFill>
-              <a:prstClr val="black"/>
-            </a:solidFill>
-          </a:ln>
-        </p:spPr>
-        <p:txBody>
-          <a:bodyPr vert="horz" lIns="91440" tIns="45720" rIns="91440" bIns="45720" rtlCol="0" anchor="ctr"/>
-          <a:lstStyle/>
-          <a:p>
-            <a:endParaRPr lang="en-US"/>
-          </a:p>
-        </p:txBody>
-      </p:sp>
-      <p:sp>
-        <p:nvSpPr>
-          <p:cNvPr id="5" name="Notes Placeholder 4"/>
-          <p:cNvSpPr>
-            <a:spLocks noGrp="1"/>
-          </p:cNvSpPr>
-          <p:nvPr>
-            <p:ph type="body" sz="quarter" idx="3"/>
-          </p:nvPr>
-        </p:nvSpPr>
-        <p:spPr>
-          <a:xfrm>
-            <a:off x="685800" y="4400550"/>
-            <a:ext cx="5486400" cy="3600450"/>
-          </a:xfrm>
-          <a:prstGeom prst="rect">
-            <a:avLst/>
-          </a:prstGeom>
-        </p:spPr>
-        <p:txBody>
-          <a:bodyPr vert="horz" lIns="91440" tIns="45720" rIns="91440" bIns="45720" rtlCol="0"/>
-          <a:lstStyle/>
-          <a:p>
-            <a:pPr lvl="0"/>
-            <a:r>
-              <a:rPr lang="en-US"/>
-              <a:t>Click to edit Master text styles</a:t>
-            </a:r>
-          </a:p>
-          <a:p>
-            <a:pPr lvl="1"/>
-            <a:r>
-              <a:rPr lang="en-US"/>
-              <a:t>Second level</a:t>
-            </a:r>
-          </a:p>
-          <a:p>
-            <a:pPr lvl="2"/>
-            <a:r>
-              <a:rPr lang="en-US"/>
-              <a:t>Third level</a:t>
-            </a:r>
-          </a:p>
-          <a:p>
-            <a:pPr lvl="3"/>
-            <a:r>
-              <a:rPr lang="en-US"/>
-              <a:t>Fourth level</a:t>
-            </a:r>
-          </a:p>
-          <a:p>
-            <a:pPr lvl="4"/>
-            <a:r>
-              <a:rPr lang="en-US"/>
-              <a:t>Fifth level</a:t>
-            </a:r>
-          </a:p>
-        </p:txBody>
-      </p:sp>
-      <p:sp>
-        <p:nvSpPr>
-          <p:cNvPr id="6" name="Footer Placeholder 5"/>
-          <p:cNvSpPr>
-            <a:spLocks noGrp="1"/>
-          </p:cNvSpPr>
-          <p:nvPr>
-            <p:ph type="ftr" sz="quarter" idx="4"/>
-          </p:nvPr>
-        </p:nvSpPr>
-        <p:spPr>
-          <a:xfrm>
-            <a:off x="0" y="8685213"/>
-            <a:ext cx="2971800" cy="458787"/>
-          </a:xfrm>
-          <a:prstGeom prst="rect">
-            <a:avLst/>
-          </a:prstGeom>
-        </p:spPr>
-        <p:txBody>
-          <a:bodyPr vert="horz" lIns="91440" tIns="45720" rIns="91440" bIns="45720" rtlCol="0" anchor="b"/>
-          <a:lstStyle>
-            <a:lvl1pPr algn="l">
-              <a:defRPr sz="1200"/>
-            </a:lvl1pPr>
-          </a:lstStyle>
-          <a:p>
-            <a:endParaRPr lang="en-US"/>
-          </a:p>
-        </p:txBody>
-      </p:sp>
-      <p:sp>
-        <p:nvSpPr>
-          <p:cNvPr id="7" name="Slide Number Placeholder 6"/>
-          <p:cNvSpPr>
-            <a:spLocks noGrp="1"/>
-          </p:cNvSpPr>
-          <p:nvPr>
-            <p:ph type="sldNum" sz="quarter" idx="5"/>
-          </p:nvPr>
-        </p:nvSpPr>
-        <p:spPr>
-          <a:xfrm>
-            <a:off x="3884613" y="8685213"/>
-            <a:ext cx="2971800" cy="458787"/>
-          </a:xfrm>
-          <a:prstGeom prst="rect">
-            <a:avLst/>
-          </a:prstGeom>
-        </p:spPr>
-        <p:txBody>
-          <a:bodyPr vert="horz" lIns="91440" tIns="45720" rIns="91440" bIns="45720" rtlCol="0" anchor="b"/>
-          <a:lstStyle>
-            <a:lvl1pPr algn="r">
-              <a:defRPr sz="1200"/>
-            </a:lvl1pPr>
-          </a:lstStyle>
-          <a:p>
-            <a:fld id="{CE5E9CC1-C706-0F49-92D6-E571CC5EEA8F}" type="slidenum">
-              <a:rPr lang="en-US"/>
-              <a:t>‹#›</a:t>
-            </a:fld>
-            <a:endParaRPr lang="en-US"/>
-          </a:p>
-        </p:txBody>
-      </p:sp>
     </p:spTree>
     <p:extLst>
       <p:ext uri="{BB962C8B-B14F-4D97-AF65-F5344CB8AC3E}">
-        <p14:creationId xmlns:p14="http://schemas.microsoft.com/office/powerpoint/2010/main" val="1024086991"/>
+        <p14:creationId xmlns:p14="http://schemas.microsoft.com/office/powerpoint/2010/main" val="3244251075"/>
       </p:ext>
     </p:extLst>
   </p:cSld>
@@ -505,10 +284,6 @@
           <a:bodyPr/>
           <a:lstStyle/>
           <a:p>
-            <a:r>
-              <a:rPr lang="en-US" dirty="0"/>
-              <a:t/>
-            </a:r>
             <a:endParaRPr lang="en-US" dirty="0"/>
           </a:p>
         </p:txBody>
@@ -593,10 +368,6 @@
           <a:bodyPr/>
           <a:lstStyle/>
           <a:p>
-            <a:r>
-              <a:rPr lang="en-US" dirty="0"/>
-              <a:t/>
-            </a:r>
             <a:endParaRPr lang="en-US" dirty="0"/>
           </a:p>
         </p:txBody>
@@ -681,10 +452,6 @@
           <a:bodyPr/>
           <a:lstStyle/>
           <a:p>
-            <a:r>
-              <a:rPr lang="en-US" dirty="0"/>
-              <a:t/>
-            </a:r>
             <a:endParaRPr lang="en-US" dirty="0"/>
           </a:p>
         </p:txBody>
@@ -769,10 +536,6 @@
           <a:bodyPr/>
           <a:lstStyle/>
           <a:p>
-            <a:r>
-              <a:rPr lang="en-US" dirty="0"/>
-              <a:t/>
-            </a:r>
             <a:endParaRPr lang="en-US" dirty="0"/>
           </a:p>
         </p:txBody>
@@ -795,182 +558,6 @@
             <a:fld id="{F7021451-1387-4CA6-816F-3879F97B5CBC}" type="slidenum">
               <a:rPr lang="en-US"/>
               <a:t>4</a:t>
-            </a:fld>
-            <a:endParaRPr lang="en-US"/>
-          </a:p>
-        </p:txBody>
-      </p:sp>
-    </p:spTree>
-    <p:extLst>
-      <p:ext uri="{BB962C8B-B14F-4D97-AF65-F5344CB8AC3E}">
-        <p14:creationId xmlns:p14="http://schemas.microsoft.com/office/powerpoint/2010/main" val="1024086991"/>
-      </p:ext>
-    </p:extLst>
-  </p:cSld>
-  <p:clrMapOvr>
-    <a:masterClrMapping/>
-  </p:clrMapOvr>
-</p:notes>
-</file>
-
-<file path=ppt/notesSlides/notesSlide5.xml><?xml version="1.0" encoding="utf-8"?>
-<p:notes xmlns:a="http://schemas.openxmlformats.org/drawingml/2006/main" xmlns:r="http://schemas.openxmlformats.org/officeDocument/2006/relationships" xmlns:p="http://schemas.openxmlformats.org/presentationml/2006/main">
-  <p:cSld>
-    <p:spTree>
-      <p:nvGrpSpPr>
-        <p:cNvPr id="1" name=""/>
-        <p:cNvGrpSpPr/>
-        <p:nvPr/>
-      </p:nvGrpSpPr>
-      <p:grpSpPr>
-        <a:xfrm>
-          <a:off x="0" y="0"/>
-          <a:ext cx="0" cy="0"/>
-          <a:chOff x="0" y="0"/>
-          <a:chExt cx="0" cy="0"/>
-        </a:xfrm>
-      </p:grpSpPr>
-      <p:sp>
-        <p:nvSpPr>
-          <p:cNvPr id="2" name="Slide Image Placeholder 1"/>
-          <p:cNvSpPr>
-            <a:spLocks noGrp="1" noRot="1" noChangeAspect="1"/>
-          </p:cNvSpPr>
-          <p:nvPr>
-            <p:ph type="sldImg"/>
-          </p:nvPr>
-        </p:nvSpPr>
-        <p:spPr/>
-      </p:sp>
-      <p:sp>
-        <p:nvSpPr>
-          <p:cNvPr id="3" name="Notes Placeholder 2"/>
-          <p:cNvSpPr>
-            <a:spLocks noGrp="1"/>
-          </p:cNvSpPr>
-          <p:nvPr>
-            <p:ph type="body" idx="1"/>
-          </p:nvPr>
-        </p:nvSpPr>
-        <p:spPr/>
-        <p:txBody>
-          <a:bodyPr/>
-          <a:lstStyle/>
-          <a:p>
-            <a:r>
-              <a:rPr lang="en-US" dirty="0"/>
-              <a:t/>
-            </a:r>
-            <a:endParaRPr lang="en-US" dirty="0"/>
-          </a:p>
-        </p:txBody>
-      </p:sp>
-      <p:sp>
-        <p:nvSpPr>
-          <p:cNvPr id="4" name="Slide Number Placeholder 3"/>
-          <p:cNvSpPr>
-            <a:spLocks noGrp="1"/>
-          </p:cNvSpPr>
-          <p:nvPr>
-            <p:ph type="sldNum" sz="quarter" idx="10"/>
-          </p:nvPr>
-        </p:nvSpPr>
-        <p:spPr/>
-        <p:txBody>
-          <a:bodyPr/>
-          <a:lstStyle/>
-          <a:p>
-            <a:fld id="{F7021451-1387-4CA6-816F-3879F97B5CBC}" type="slidenum">
-              <a:rPr lang="en-US"/>
-              <a:t>5</a:t>
-            </a:fld>
-            <a:endParaRPr lang="en-US"/>
-          </a:p>
-        </p:txBody>
-      </p:sp>
-    </p:spTree>
-    <p:extLst>
-      <p:ext uri="{BB962C8B-B14F-4D97-AF65-F5344CB8AC3E}">
-        <p14:creationId xmlns:p14="http://schemas.microsoft.com/office/powerpoint/2010/main" val="1024086991"/>
-      </p:ext>
-    </p:extLst>
-  </p:cSld>
-  <p:clrMapOvr>
-    <a:masterClrMapping/>
-  </p:clrMapOvr>
-</p:notes>
-</file>
-
-<file path=ppt/notesSlides/notesSlide6.xml><?xml version="1.0" encoding="utf-8"?>
-<p:notes xmlns:a="http://schemas.openxmlformats.org/drawingml/2006/main" xmlns:r="http://schemas.openxmlformats.org/officeDocument/2006/relationships" xmlns:p="http://schemas.openxmlformats.org/presentationml/2006/main">
-  <p:cSld>
-    <p:spTree>
-      <p:nvGrpSpPr>
-        <p:cNvPr id="1" name=""/>
-        <p:cNvGrpSpPr/>
-        <p:nvPr/>
-      </p:nvGrpSpPr>
-      <p:grpSpPr>
-        <a:xfrm>
-          <a:off x="0" y="0"/>
-          <a:ext cx="0" cy="0"/>
-          <a:chOff x="0" y="0"/>
-          <a:chExt cx="0" cy="0"/>
-        </a:xfrm>
-      </p:grpSpPr>
-      <p:sp>
-        <p:nvSpPr>
-          <p:cNvPr id="2" name="Slide Image Placeholder 1"/>
-          <p:cNvSpPr>
-            <a:spLocks noGrp="1" noRot="1" noChangeAspect="1"/>
-          </p:cNvSpPr>
-          <p:nvPr>
-            <p:ph type="sldImg"/>
-          </p:nvPr>
-        </p:nvSpPr>
-        <p:spPr/>
-      </p:sp>
-      <p:sp>
-        <p:nvSpPr>
-          <p:cNvPr id="3" name="Notes Placeholder 2"/>
-          <p:cNvSpPr>
-            <a:spLocks noGrp="1"/>
-          </p:cNvSpPr>
-          <p:nvPr>
-            <p:ph type="body" idx="1"/>
-          </p:nvPr>
-        </p:nvSpPr>
-        <p:spPr/>
-        <p:txBody>
-          <a:bodyPr/>
-          <a:lstStyle/>
-          <a:p>
-            <a:r>
-              <a:rPr lang="en-US" dirty="0"/>
-              <a:t/>
-            </a:r>
-            <a:endParaRPr lang="en-US" dirty="0"/>
-          </a:p>
-        </p:txBody>
-      </p:sp>
-      <p:sp>
-        <p:nvSpPr>
-          <p:cNvPr id="4" name="Slide Number Placeholder 3"/>
-          <p:cNvSpPr>
-            <a:spLocks noGrp="1"/>
-          </p:cNvSpPr>
-          <p:nvPr>
-            <p:ph type="sldNum" sz="quarter" idx="10"/>
-          </p:nvPr>
-        </p:nvSpPr>
-        <p:spPr/>
-        <p:txBody>
-          <a:bodyPr/>
-          <a:lstStyle/>
-          <a:p>
-            <a:fld id="{F7021451-1387-4CA6-816F-3879F97B5CBC}" type="slidenum">
-              <a:rPr lang="en-US"/>
-              <a:t>6</a:t>
             </a:fld>
             <a:endParaRPr lang="en-US"/>
           </a:p>
@@ -1022,6 +609,11 @@
 <file path=ppt/slideMasters/slideMaster1.xml><?xml version="1.0" encoding="utf-8"?>
 <p:sldMaster xmlns:a="http://schemas.openxmlformats.org/drawingml/2006/main" xmlns:r="http://schemas.openxmlformats.org/officeDocument/2006/relationships" xmlns:p="http://schemas.openxmlformats.org/presentationml/2006/main">
   <p:cSld>
+    <p:bg>
+      <p:bgRef idx="1001">
+        <a:schemeClr val="bg1"/>
+      </p:bgRef>
+    </p:bg>
     <p:spTree>
       <p:nvGrpSpPr>
         <p:cNvPr id="1" name=""/>
@@ -1304,6 +896,7 @@
         <a:solidFill>
           <a:srgbClr val="0D1B2A"/>
         </a:solidFill>
+        <a:effectLst/>
       </p:bgPr>
     </p:bg>
     <p:spTree>
@@ -1344,6 +937,13 @@
             <a:prstDash val="solid"/>
           </a:ln>
         </p:spPr>
+        <p:txBody>
+          <a:bodyPr/>
+          <a:lstStyle/>
+          <a:p>
+            <a:endParaRPr lang="en-US"/>
+          </a:p>
+        </p:txBody>
       </p:sp>
       <p:sp>
         <p:nvSpPr>
@@ -1371,6 +971,13 @@
             <a:prstDash val="solid"/>
           </a:ln>
         </p:spPr>
+        <p:txBody>
+          <a:bodyPr/>
+          <a:lstStyle/>
+          <a:p>
+            <a:endParaRPr lang="en-US"/>
+          </a:p>
+        </p:txBody>
       </p:sp>
       <p:sp>
         <p:nvSpPr>
@@ -1396,6 +1003,13 @@
             <a:prstDash val="solid"/>
           </a:ln>
         </p:spPr>
+        <p:txBody>
+          <a:bodyPr/>
+          <a:lstStyle/>
+          <a:p>
+            <a:endParaRPr lang="en-US"/>
+          </a:p>
+        </p:txBody>
       </p:sp>
       <p:sp>
         <p:nvSpPr>
@@ -1421,6 +1035,13 @@
             <a:prstDash val="solid"/>
           </a:ln>
         </p:spPr>
+        <p:txBody>
+          <a:bodyPr/>
+          <a:lstStyle/>
+          <a:p>
+            <a:endParaRPr lang="en-US"/>
+          </a:p>
+        </p:txBody>
       </p:sp>
       <p:sp>
         <p:nvSpPr>
@@ -1443,11 +1064,11 @@
           <a:bodyPr wrap="square" rtlCol="0" anchor="ctr"/>
           <a:lstStyle/>
           <a:p>
-            <a:pPr algn="ctr" indent="0" marL="0">
+            <a:pPr marL="0" indent="0" algn="ctr">
               <a:buNone/>
             </a:pPr>
             <a:r>
-              <a:rPr lang="en-US" sz="3200" b="1" spc="300" kern="0" dirty="0">
+              <a:rPr lang="en-US" sz="3200" b="1" kern="0" spc="300" dirty="0">
                 <a:solidFill>
                   <a:srgbClr val="FFFFFF"/>
                 </a:solidFill>
@@ -1482,7 +1103,7 @@
           <a:bodyPr wrap="square" rtlCol="0" anchor="ctr"/>
           <a:lstStyle/>
           <a:p>
-            <a:pPr algn="ctr" indent="0" marL="0">
+            <a:pPr marL="0" indent="0" algn="ctr">
               <a:buNone/>
             </a:pPr>
             <a:r>
@@ -1524,6 +1145,13 @@
             <a:prstDash val="solid"/>
           </a:ln>
         </p:spPr>
+        <p:txBody>
+          <a:bodyPr/>
+          <a:lstStyle/>
+          <a:p>
+            <a:endParaRPr lang="en-US"/>
+          </a:p>
+        </p:txBody>
       </p:sp>
       <p:sp>
         <p:nvSpPr>
@@ -1546,9 +1174,7 @@
           <a:bodyPr wrap="square" rtlCol="0" anchor="ctr"/>
           <a:lstStyle/>
           <a:p>
-            <a:pPr algn="ctr" indent="0" marL="0">
-              <a:buNone/>
-            </a:pPr>
+            <a:pPr algn="ctr"/>
             <a:r>
               <a:rPr lang="en-US" sz="1200" dirty="0">
                 <a:solidFill>
@@ -1558,7 +1184,18 @@
                 <a:ea typeface="Calibri" pitchFamily="34" charset="-122"/>
                 <a:cs typeface="Calibri" pitchFamily="34" charset="-120"/>
               </a:rPr>
-              <a:t>CUHackIt 2026  |  YOLOv8  ·  OpenCV  ·  Raspberry Pi</a:t>
+              <a:t>CUHackIt 2026  |  YOLOv8  ·  OpenCV  ·  Raspberry Pi OpenCV  ·  </a:t>
+            </a:r>
+            <a:r>
+              <a:rPr lang="en-US" sz="1200" dirty="0" err="1">
+                <a:solidFill>
+                  <a:srgbClr val="94A3B8"/>
+                </a:solidFill>
+                <a:latin typeface="Calibri" pitchFamily="34" charset="0"/>
+                <a:ea typeface="Calibri" pitchFamily="34" charset="-122"/>
+                <a:cs typeface="Calibri" pitchFamily="34" charset="-120"/>
+              </a:rPr>
+              <a:t>BackBoard</a:t>
             </a:r>
             <a:endParaRPr lang="en-US" sz="1200" dirty="0"/>
           </a:p>
@@ -1592,6 +1229,13 @@
             <a:prstDash val="solid"/>
           </a:ln>
         </p:spPr>
+        <p:txBody>
+          <a:bodyPr/>
+          <a:lstStyle/>
+          <a:p>
+            <a:endParaRPr lang="en-US"/>
+          </a:p>
+        </p:txBody>
       </p:sp>
     </p:spTree>
   </p:cSld>
@@ -1609,6 +1253,7 @@
         <a:solidFill>
           <a:srgbClr val="0D1B2A"/>
         </a:solidFill>
+        <a:effectLst/>
       </p:bgPr>
     </p:bg>
     <p:spTree>
@@ -1649,6 +1294,13 @@
             <a:prstDash val="solid"/>
           </a:ln>
         </p:spPr>
+        <p:txBody>
+          <a:bodyPr/>
+          <a:lstStyle/>
+          <a:p>
+            <a:endParaRPr lang="en-US"/>
+          </a:p>
+        </p:txBody>
       </p:sp>
       <p:sp>
         <p:nvSpPr>
@@ -1671,11 +1323,11 @@
           <a:bodyPr wrap="square" rtlCol="0" anchor="ctr"/>
           <a:lstStyle/>
           <a:p>
-            <a:pPr indent="0" marL="0">
+            <a:pPr marL="0" indent="0">
               <a:buNone/>
             </a:pPr>
             <a:r>
-              <a:rPr lang="en-US" sz="2600" b="1" spc="200" kern="0" dirty="0">
+              <a:rPr lang="en-US" sz="2600" b="1" kern="0" spc="200" dirty="0">
                 <a:solidFill>
                   <a:srgbClr val="FFFFFF"/>
                 </a:solidFill>
@@ -1713,6 +1365,13 @@
             <a:prstDash val="solid"/>
           </a:ln>
         </p:spPr>
+        <p:txBody>
+          <a:bodyPr/>
+          <a:lstStyle/>
+          <a:p>
+            <a:endParaRPr lang="en-US"/>
+          </a:p>
+        </p:txBody>
       </p:sp>
       <p:sp>
         <p:nvSpPr>
@@ -1738,13 +1397,20 @@
             <a:prstDash val="solid"/>
           </a:ln>
           <a:effectLst>
-            <a:outerShdw sx="100000" sy="100000" kx="0" ky="0" algn="bl" rotWithShape="0" blurRad="101600" dist="38100" dir="8100000">
+            <a:outerShdw blurRad="101600" dist="38100" dir="8100000" algn="bl" rotWithShape="0">
               <a:srgbClr val="000000">
                 <a:alpha val="20000"/>
               </a:srgbClr>
             </a:outerShdw>
           </a:effectLst>
         </p:spPr>
+        <p:txBody>
+          <a:bodyPr/>
+          <a:lstStyle/>
+          <a:p>
+            <a:endParaRPr lang="en-US"/>
+          </a:p>
+        </p:txBody>
       </p:sp>
       <p:sp>
         <p:nvSpPr>
@@ -1767,7 +1433,7 @@
           <a:bodyPr wrap="square" lIns="0" tIns="0" rIns="0" bIns="0" rtlCol="0" anchor="ctr"/>
           <a:lstStyle/>
           <a:p>
-            <a:pPr indent="0" marL="0">
+            <a:pPr marL="0" indent="0">
               <a:buNone/>
             </a:pPr>
             <a:r>
@@ -1806,7 +1472,7 @@
           <a:bodyPr wrap="square" lIns="0" tIns="0" rIns="0" bIns="0" rtlCol="0" anchor="ctr"/>
           <a:lstStyle/>
           <a:p>
-            <a:pPr indent="0" marL="0">
+            <a:pPr marL="0" indent="0">
               <a:buNone/>
             </a:pPr>
             <a:r>
@@ -1818,7 +1484,7 @@
                 <a:ea typeface="Calibri" pitchFamily="34" charset="-122"/>
                 <a:cs typeface="Calibri" pitchFamily="34" charset="-120"/>
               </a:rPr>
-              <a:t>Workers in hazardous zones go undetected — delayed alerts cost lives.</a:t>
+              <a:t>Workers in hazardous zones go undetected. Delayed alerts cost lives.</a:t>
             </a:r>
             <a:endParaRPr lang="en-US" sz="1100" dirty="0"/>
           </a:p>
@@ -1848,13 +1514,20 @@
             <a:prstDash val="solid"/>
           </a:ln>
           <a:effectLst>
-            <a:outerShdw sx="100000" sy="100000" kx="0" ky="0" algn="bl" rotWithShape="0" blurRad="101600" dist="38100" dir="8100000">
+            <a:outerShdw blurRad="101600" dist="38100" dir="8100000" algn="bl" rotWithShape="0">
               <a:srgbClr val="000000">
                 <a:alpha val="20000"/>
               </a:srgbClr>
             </a:outerShdw>
           </a:effectLst>
         </p:spPr>
+        <p:txBody>
+          <a:bodyPr/>
+          <a:lstStyle/>
+          <a:p>
+            <a:endParaRPr lang="en-US"/>
+          </a:p>
+        </p:txBody>
       </p:sp>
       <p:sp>
         <p:nvSpPr>
@@ -1877,7 +1550,7 @@
           <a:bodyPr wrap="square" lIns="0" tIns="0" rIns="0" bIns="0" rtlCol="0" anchor="ctr"/>
           <a:lstStyle/>
           <a:p>
-            <a:pPr indent="0" marL="0">
+            <a:pPr marL="0" indent="0">
               <a:buNone/>
             </a:pPr>
             <a:r>
@@ -1916,7 +1589,7 @@
           <a:bodyPr wrap="square" lIns="0" tIns="0" rIns="0" bIns="0" rtlCol="0" anchor="ctr"/>
           <a:lstStyle/>
           <a:p>
-            <a:pPr indent="0" marL="0">
+            <a:pPr marL="0" indent="0">
               <a:buNone/>
             </a:pPr>
             <a:r>
@@ -1958,13 +1631,20 @@
             <a:prstDash val="solid"/>
           </a:ln>
           <a:effectLst>
-            <a:outerShdw sx="100000" sy="100000" kx="0" ky="0" algn="bl" rotWithShape="0" blurRad="101600" dist="38100" dir="8100000">
+            <a:outerShdw blurRad="101600" dist="38100" dir="8100000" algn="bl" rotWithShape="0">
               <a:srgbClr val="000000">
                 <a:alpha val="20000"/>
               </a:srgbClr>
             </a:outerShdw>
           </a:effectLst>
         </p:spPr>
+        <p:txBody>
+          <a:bodyPr/>
+          <a:lstStyle/>
+          <a:p>
+            <a:endParaRPr lang="en-US"/>
+          </a:p>
+        </p:txBody>
       </p:sp>
       <p:sp>
         <p:nvSpPr>
@@ -1987,7 +1667,7 @@
           <a:bodyPr wrap="square" lIns="0" tIns="0" rIns="0" bIns="0" rtlCol="0" anchor="ctr"/>
           <a:lstStyle/>
           <a:p>
-            <a:pPr indent="0" marL="0">
+            <a:pPr marL="0" indent="0">
               <a:buNone/>
             </a:pPr>
             <a:r>
@@ -2026,7 +1706,7 @@
           <a:bodyPr wrap="square" lIns="0" tIns="0" rIns="0" bIns="0" rtlCol="0" anchor="ctr"/>
           <a:lstStyle/>
           <a:p>
-            <a:pPr indent="0" marL="0">
+            <a:pPr marL="0" indent="0">
               <a:buNone/>
             </a:pPr>
             <a:r>
@@ -2068,13 +1748,20 @@
             <a:prstDash val="solid"/>
           </a:ln>
           <a:effectLst>
-            <a:outerShdw sx="100000" sy="100000" kx="0" ky="0" algn="bl" rotWithShape="0" blurRad="101600" dist="38100" dir="8100000">
+            <a:outerShdw blurRad="101600" dist="38100" dir="8100000" algn="bl" rotWithShape="0">
               <a:srgbClr val="000000">
                 <a:alpha val="20000"/>
               </a:srgbClr>
             </a:outerShdw>
           </a:effectLst>
         </p:spPr>
+        <p:txBody>
+          <a:bodyPr/>
+          <a:lstStyle/>
+          <a:p>
+            <a:endParaRPr lang="en-US"/>
+          </a:p>
+        </p:txBody>
       </p:sp>
       <p:sp>
         <p:nvSpPr>
@@ -2097,7 +1784,7 @@
           <a:bodyPr wrap="square" lIns="0" tIns="0" rIns="0" bIns="0" rtlCol="0" anchor="ctr"/>
           <a:lstStyle/>
           <a:p>
-            <a:pPr indent="0" marL="0">
+            <a:pPr marL="0" indent="0">
               <a:buNone/>
             </a:pPr>
             <a:r>
@@ -2136,7 +1823,7 @@
           <a:bodyPr wrap="square" lIns="0" tIns="0" rIns="0" bIns="0" rtlCol="0" anchor="ctr"/>
           <a:lstStyle/>
           <a:p>
-            <a:pPr indent="0" marL="0">
+            <a:pPr marL="0" indent="0">
               <a:buNone/>
             </a:pPr>
             <a:r>
@@ -2148,7 +1835,7 @@
                 <a:ea typeface="Calibri" pitchFamily="34" charset="-122"/>
                 <a:cs typeface="Calibri" pitchFamily="34" charset="-120"/>
               </a:rPr>
-              <a:t>Lights, HVAC, and systems run in empty rooms because occupancy is unknown.</a:t>
+              <a:t>Full safety systems may run in empty rooms because occupancy is unknown.</a:t>
             </a:r>
             <a:endParaRPr lang="en-US" sz="1100" dirty="0"/>
           </a:p>
@@ -2164,12 +1851,13 @@
 
 <file path=ppt/slides/slide3.xml><?xml version="1.0" encoding="utf-8"?>
 <p:sld xmlns:a="http://schemas.openxmlformats.org/drawingml/2006/main" xmlns:r="http://schemas.openxmlformats.org/officeDocument/2006/relationships" xmlns:p="http://schemas.openxmlformats.org/presentationml/2006/main">
-  <p:cSld name="Slide 3">
+  <p:cSld name="Slide 4">
     <p:bg>
       <p:bgPr>
         <a:solidFill>
           <a:srgbClr val="0D1B2A"/>
         </a:solidFill>
+        <a:effectLst/>
       </p:bgPr>
     </p:bg>
     <p:spTree>
@@ -2210,6 +1898,13 @@
             <a:prstDash val="solid"/>
           </a:ln>
         </p:spPr>
+        <p:txBody>
+          <a:bodyPr/>
+          <a:lstStyle/>
+          <a:p>
+            <a:endParaRPr lang="en-US"/>
+          </a:p>
+        </p:txBody>
       </p:sp>
       <p:sp>
         <p:nvSpPr>
@@ -2232,11 +1927,11 @@
           <a:bodyPr wrap="square" rtlCol="0" anchor="ctr"/>
           <a:lstStyle/>
           <a:p>
-            <a:pPr indent="0" marL="0">
+            <a:pPr marL="0" indent="0">
               <a:buNone/>
             </a:pPr>
             <a:r>
-              <a:rPr lang="en-US" sz="2600" b="1" spc="200" kern="0" dirty="0">
+              <a:rPr lang="en-US" sz="2600" b="1" kern="0" spc="200" dirty="0">
                 <a:solidFill>
                   <a:srgbClr val="FFFFFF"/>
                 </a:solidFill>
@@ -2244,7 +1939,7 @@
                 <a:ea typeface="Arial Black" pitchFamily="34" charset="-122"/>
                 <a:cs typeface="Arial Black" pitchFamily="34" charset="-120"/>
               </a:rPr>
-              <a:t>OUR SOLUTION</a:t>
+              <a:t>WHO BENEFITS?</a:t>
             </a:r>
             <a:endParaRPr lang="en-US" sz="2600" dirty="0"/>
           </a:p>
@@ -2252,53 +1947,14 @@
       </p:sp>
       <p:sp>
         <p:nvSpPr>
-          <p:cNvPr id="4" name="Text 2"/>
-          <p:cNvSpPr/>
-          <p:nvPr/>
-        </p:nvSpPr>
-        <p:spPr>
-          <a:xfrm>
-            <a:off x="457200" y="822960"/>
-            <a:ext cx="8229600" cy="548640"/>
-          </a:xfrm>
-          <a:prstGeom prst="rect">
-            <a:avLst/>
-          </a:prstGeom>
-          <a:noFill/>
-          <a:ln/>
-        </p:spPr>
-        <p:txBody>
-          <a:bodyPr wrap="square" rtlCol="0" anchor="ctr"/>
-          <a:lstStyle/>
-          <a:p>
-            <a:pPr algn="l" indent="0" marL="0">
-              <a:buNone/>
-            </a:pPr>
-            <a:r>
-              <a:rPr lang="en-US" sz="1300" dirty="0">
-                <a:solidFill>
-                  <a:srgbClr val="E0F7FA"/>
-                </a:solidFill>
-                <a:latin typeface="Calibri" pitchFamily="34" charset="0"/>
-                <a:ea typeface="Calibri" pitchFamily="34" charset="-122"/>
-                <a:cs typeface="Calibri" pitchFamily="34" charset="-120"/>
-              </a:rPr>
-              <a:t>A lightweight, real-time human detection system using YOLOv8 AI + OpenCV — deployable on low-cost hardware including Raspberry Pi.</a:t>
-            </a:r>
-            <a:endParaRPr lang="en-US" sz="1300" dirty="0"/>
-          </a:p>
-        </p:txBody>
-      </p:sp>
-      <p:sp>
-        <p:nvSpPr>
-          <p:cNvPr id="5" name="Shape 3"/>
-          <p:cNvSpPr/>
-          <p:nvPr/>
-        </p:nvSpPr>
-        <p:spPr>
-          <a:xfrm>
-            <a:off x="274320" y="1508760"/>
-            <a:ext cx="2743200" cy="2377440"/>
+          <p:cNvPr id="4" name="Shape 2"/>
+          <p:cNvSpPr/>
+          <p:nvPr/>
+        </p:nvSpPr>
+        <p:spPr>
+          <a:xfrm>
+            <a:off x="274320" y="1005840"/>
+            <a:ext cx="2788920" cy="1600200"/>
           </a:xfrm>
           <a:prstGeom prst="rect">
             <a:avLst/>
@@ -2306,56 +1962,38 @@
           <a:solidFill>
             <a:srgbClr val="1A2E42"/>
           </a:solidFill>
-          <a:ln w="12700">
+          <a:ln w="6350">
             <a:solidFill>
               <a:srgbClr val="00C9FF"/>
             </a:solidFill>
             <a:prstDash val="solid"/>
           </a:ln>
           <a:effectLst>
-            <a:outerShdw sx="100000" sy="100000" kx="0" ky="0" algn="bl" rotWithShape="0" blurRad="101600" dist="38100" dir="8100000">
+            <a:outerShdw blurRad="101600" dist="38100" dir="8100000" algn="bl" rotWithShape="0">
               <a:srgbClr val="000000">
                 <a:alpha val="20000"/>
               </a:srgbClr>
             </a:outerShdw>
           </a:effectLst>
         </p:spPr>
-      </p:sp>
-      <p:sp>
-        <p:nvSpPr>
-          <p:cNvPr id="6" name="Shape 4"/>
-          <p:cNvSpPr/>
-          <p:nvPr/>
-        </p:nvSpPr>
-        <p:spPr>
-          <a:xfrm>
-            <a:off x="274320" y="1508760"/>
-            <a:ext cx="2743200" cy="73152"/>
-          </a:xfrm>
-          <a:prstGeom prst="rect">
-            <a:avLst/>
-          </a:prstGeom>
-          <a:solidFill>
-            <a:srgbClr val="00C9FF"/>
-          </a:solidFill>
-          <a:ln w="12700">
-            <a:solidFill>
-              <a:srgbClr val="00C9FF"/>
-            </a:solidFill>
-            <a:prstDash val="solid"/>
-          </a:ln>
-        </p:spPr>
-      </p:sp>
-      <p:sp>
-        <p:nvSpPr>
-          <p:cNvPr id="7" name="Text 5"/>
-          <p:cNvSpPr/>
-          <p:nvPr/>
-        </p:nvSpPr>
-        <p:spPr>
-          <a:xfrm>
-            <a:off x="274320" y="1691640"/>
-            <a:ext cx="2743200" cy="640080"/>
+        <p:txBody>
+          <a:bodyPr/>
+          <a:lstStyle/>
+          <a:p>
+            <a:endParaRPr lang="en-US"/>
+          </a:p>
+        </p:txBody>
+      </p:sp>
+      <p:sp>
+        <p:nvSpPr>
+          <p:cNvPr id="5" name="Text 3"/>
+          <p:cNvSpPr/>
+          <p:nvPr/>
+        </p:nvSpPr>
+        <p:spPr>
+          <a:xfrm>
+            <a:off x="274320" y="1097280"/>
+            <a:ext cx="2788920" cy="502920"/>
           </a:xfrm>
           <a:prstGeom prst="rect">
             <a:avLst/>
@@ -2367,31 +2005,31 @@
           <a:bodyPr wrap="square" rtlCol="0" anchor="ctr"/>
           <a:lstStyle/>
           <a:p>
-            <a:pPr algn="ctr" indent="0" marL="0">
+            <a:pPr marL="0" indent="0" algn="ctr">
               <a:buNone/>
             </a:pPr>
             <a:r>
-              <a:rPr lang="en-US" sz="3200" dirty="0">
+              <a:rPr lang="en-US" sz="2400" dirty="0">
                 <a:solidFill>
                   <a:srgbClr val="000000"/>
                 </a:solidFill>
               </a:rPr>
-              <a:t>👁</a:t>
-            </a:r>
-            <a:endParaRPr lang="en-US" sz="3200" dirty="0"/>
-          </a:p>
-        </p:txBody>
-      </p:sp>
-      <p:sp>
-        <p:nvSpPr>
-          <p:cNvPr id="8" name="Text 6"/>
-          <p:cNvSpPr/>
-          <p:nvPr/>
-        </p:nvSpPr>
-        <p:spPr>
-          <a:xfrm>
-            <a:off x="365760" y="2423160"/>
-            <a:ext cx="2560320" cy="365760"/>
+              <a:t>🏭</a:t>
+            </a:r>
+            <a:endParaRPr lang="en-US" sz="2400" dirty="0"/>
+          </a:p>
+        </p:txBody>
+      </p:sp>
+      <p:sp>
+        <p:nvSpPr>
+          <p:cNvPr id="6" name="Text 4"/>
+          <p:cNvSpPr/>
+          <p:nvPr/>
+        </p:nvSpPr>
+        <p:spPr>
+          <a:xfrm>
+            <a:off x="365760" y="1627632"/>
+            <a:ext cx="2606040" cy="320040"/>
           </a:xfrm>
           <a:prstGeom prst="rect">
             <a:avLst/>
@@ -2403,11 +2041,11 @@
           <a:bodyPr wrap="square" lIns="0" tIns="0" rIns="0" bIns="0" rtlCol="0" anchor="ctr"/>
           <a:lstStyle/>
           <a:p>
-            <a:pPr algn="ctr" indent="0" marL="0">
+            <a:pPr marL="0" indent="0" algn="ctr">
               <a:buNone/>
             </a:pPr>
             <a:r>
-              <a:rPr lang="en-US" sz="1300" b="1" dirty="0">
+              <a:rPr lang="en-US" sz="1200" b="1" dirty="0">
                 <a:solidFill>
                   <a:srgbClr val="00C9FF"/>
                 </a:solidFill>
@@ -2415,22 +2053,22 @@
                 <a:ea typeface="Calibri" pitchFamily="34" charset="-122"/>
                 <a:cs typeface="Calibri" pitchFamily="34" charset="-120"/>
               </a:rPr>
-              <a:t>Real-Time Detection</a:t>
-            </a:r>
-            <a:endParaRPr lang="en-US" sz="1300" dirty="0"/>
-          </a:p>
-        </p:txBody>
-      </p:sp>
-      <p:sp>
-        <p:nvSpPr>
-          <p:cNvPr id="9" name="Text 7"/>
-          <p:cNvSpPr/>
-          <p:nvPr/>
-        </p:nvSpPr>
-        <p:spPr>
-          <a:xfrm>
-            <a:off x="365760" y="2852928"/>
-            <a:ext cx="2560320" cy="822960"/>
+              <a:t>Industrial &amp; Manufacturing</a:t>
+            </a:r>
+            <a:endParaRPr lang="en-US" sz="1200" dirty="0"/>
+          </a:p>
+        </p:txBody>
+      </p:sp>
+      <p:sp>
+        <p:nvSpPr>
+          <p:cNvPr id="7" name="Text 5"/>
+          <p:cNvSpPr/>
+          <p:nvPr/>
+        </p:nvSpPr>
+        <p:spPr>
+          <a:xfrm>
+            <a:off x="365760" y="1965960"/>
+            <a:ext cx="2606040" cy="548640"/>
           </a:xfrm>
           <a:prstGeom prst="rect">
             <a:avLst/>
@@ -2442,11 +2080,11 @@
           <a:bodyPr wrap="square" lIns="0" tIns="0" rIns="0" bIns="0" rtlCol="0" anchor="ctr"/>
           <a:lstStyle/>
           <a:p>
-            <a:pPr algn="ctr" indent="0" marL="0">
+            <a:pPr marL="0" indent="0" algn="ctr">
               <a:buNone/>
             </a:pPr>
             <a:r>
-              <a:rPr lang="en-US" sz="1100" dirty="0">
+              <a:rPr lang="en-US" sz="1000" dirty="0">
                 <a:solidFill>
                   <a:srgbClr val="FFFFFF"/>
                 </a:solidFill>
@@ -2454,22 +2092,22 @@
                 <a:ea typeface="Calibri" pitchFamily="34" charset="-122"/>
                 <a:cs typeface="Calibri" pitchFamily="34" charset="-120"/>
               </a:rPr>
-              <a:t>YOLOv8 nano model detects humans at ~30 FPS with &lt;50ms latency</a:t>
-            </a:r>
-            <a:endParaRPr lang="en-US" sz="1100" dirty="0"/>
-          </a:p>
-        </p:txBody>
-      </p:sp>
-      <p:sp>
-        <p:nvSpPr>
-          <p:cNvPr id="10" name="Shape 8"/>
-          <p:cNvSpPr/>
-          <p:nvPr/>
-        </p:nvSpPr>
-        <p:spPr>
-          <a:xfrm>
-            <a:off x="3200400" y="1508760"/>
-            <a:ext cx="2743200" cy="2377440"/>
+              <a:t>Safety compliance, restricted zone monitoring, accident prevention</a:t>
+            </a:r>
+            <a:endParaRPr lang="en-US" sz="1000" dirty="0"/>
+          </a:p>
+        </p:txBody>
+      </p:sp>
+      <p:sp>
+        <p:nvSpPr>
+          <p:cNvPr id="8" name="Shape 6"/>
+          <p:cNvSpPr/>
+          <p:nvPr/>
+        </p:nvSpPr>
+        <p:spPr>
+          <a:xfrm>
+            <a:off x="3200400" y="1005840"/>
+            <a:ext cx="2788920" cy="1600200"/>
           </a:xfrm>
           <a:prstGeom prst="rect">
             <a:avLst/>
@@ -2477,56 +2115,38 @@
           <a:solidFill>
             <a:srgbClr val="1A2E42"/>
           </a:solidFill>
-          <a:ln w="12700">
+          <a:ln w="6350">
             <a:solidFill>
               <a:srgbClr val="00C9FF"/>
             </a:solidFill>
             <a:prstDash val="solid"/>
           </a:ln>
           <a:effectLst>
-            <a:outerShdw sx="100000" sy="100000" kx="0" ky="0" algn="bl" rotWithShape="0" blurRad="101600" dist="38100" dir="8100000">
+            <a:outerShdw blurRad="101600" dist="38100" dir="8100000" algn="bl" rotWithShape="0">
               <a:srgbClr val="000000">
                 <a:alpha val="20000"/>
               </a:srgbClr>
             </a:outerShdw>
           </a:effectLst>
         </p:spPr>
-      </p:sp>
-      <p:sp>
-        <p:nvSpPr>
-          <p:cNvPr id="11" name="Shape 9"/>
-          <p:cNvSpPr/>
-          <p:nvPr/>
-        </p:nvSpPr>
-        <p:spPr>
-          <a:xfrm>
-            <a:off x="3200400" y="1508760"/>
-            <a:ext cx="2743200" cy="73152"/>
-          </a:xfrm>
-          <a:prstGeom prst="rect">
-            <a:avLst/>
-          </a:prstGeom>
-          <a:solidFill>
-            <a:srgbClr val="00C9FF"/>
-          </a:solidFill>
-          <a:ln w="12700">
-            <a:solidFill>
-              <a:srgbClr val="00C9FF"/>
-            </a:solidFill>
-            <a:prstDash val="solid"/>
-          </a:ln>
-        </p:spPr>
-      </p:sp>
-      <p:sp>
-        <p:nvSpPr>
-          <p:cNvPr id="12" name="Text 10"/>
-          <p:cNvSpPr/>
-          <p:nvPr/>
-        </p:nvSpPr>
-        <p:spPr>
-          <a:xfrm>
-            <a:off x="3200400" y="1691640"/>
-            <a:ext cx="2743200" cy="640080"/>
+        <p:txBody>
+          <a:bodyPr/>
+          <a:lstStyle/>
+          <a:p>
+            <a:endParaRPr lang="en-US"/>
+          </a:p>
+        </p:txBody>
+      </p:sp>
+      <p:sp>
+        <p:nvSpPr>
+          <p:cNvPr id="9" name="Text 7"/>
+          <p:cNvSpPr/>
+          <p:nvPr/>
+        </p:nvSpPr>
+        <p:spPr>
+          <a:xfrm>
+            <a:off x="3200400" y="1097280"/>
+            <a:ext cx="2788920" cy="502920"/>
           </a:xfrm>
           <a:prstGeom prst="rect">
             <a:avLst/>
@@ -2538,31 +2158,31 @@
           <a:bodyPr wrap="square" rtlCol="0" anchor="ctr"/>
           <a:lstStyle/>
           <a:p>
-            <a:pPr algn="ctr" indent="0" marL="0">
+            <a:pPr marL="0" indent="0" algn="ctr">
               <a:buNone/>
             </a:pPr>
             <a:r>
-              <a:rPr lang="en-US" sz="3200" dirty="0">
+              <a:rPr lang="en-US" sz="2400" dirty="0">
                 <a:solidFill>
                   <a:srgbClr val="000000"/>
                 </a:solidFill>
               </a:rPr>
-              <a:t>📡</a:t>
-            </a:r>
-            <a:endParaRPr lang="en-US" sz="3200" dirty="0"/>
-          </a:p>
-        </p:txBody>
-      </p:sp>
-      <p:sp>
-        <p:nvSpPr>
-          <p:cNvPr id="13" name="Text 11"/>
-          <p:cNvSpPr/>
-          <p:nvPr/>
-        </p:nvSpPr>
-        <p:spPr>
-          <a:xfrm>
-            <a:off x="3291840" y="2423160"/>
-            <a:ext cx="2560320" cy="365760"/>
+              <a:t>🏥</a:t>
+            </a:r>
+            <a:endParaRPr lang="en-US" sz="2400" dirty="0"/>
+          </a:p>
+        </p:txBody>
+      </p:sp>
+      <p:sp>
+        <p:nvSpPr>
+          <p:cNvPr id="10" name="Text 8"/>
+          <p:cNvSpPr/>
+          <p:nvPr/>
+        </p:nvSpPr>
+        <p:spPr>
+          <a:xfrm>
+            <a:off x="3291840" y="1627632"/>
+            <a:ext cx="2606040" cy="320040"/>
           </a:xfrm>
           <a:prstGeom prst="rect">
             <a:avLst/>
@@ -2574,11 +2194,11 @@
           <a:bodyPr wrap="square" lIns="0" tIns="0" rIns="0" bIns="0" rtlCol="0" anchor="ctr"/>
           <a:lstStyle/>
           <a:p>
-            <a:pPr algn="ctr" indent="0" marL="0">
+            <a:pPr marL="0" indent="0" algn="ctr">
               <a:buNone/>
             </a:pPr>
             <a:r>
-              <a:rPr lang="en-US" sz="1300" b="1" dirty="0">
+              <a:rPr lang="en-US" sz="1200" b="1" dirty="0">
                 <a:solidFill>
                   <a:srgbClr val="00C9FF"/>
                 </a:solidFill>
@@ -2586,22 +2206,22 @@
                 <a:ea typeface="Calibri" pitchFamily="34" charset="-122"/>
                 <a:cs typeface="Calibri" pitchFamily="34" charset="-120"/>
               </a:rPr>
-              <a:t>Multi-Camera Support</a:t>
-            </a:r>
-            <a:endParaRPr lang="en-US" sz="1300" dirty="0"/>
-          </a:p>
-        </p:txBody>
-      </p:sp>
-      <p:sp>
-        <p:nvSpPr>
-          <p:cNvPr id="14" name="Text 12"/>
-          <p:cNvSpPr/>
-          <p:nvPr/>
-        </p:nvSpPr>
-        <p:spPr>
-          <a:xfrm>
-            <a:off x="3291840" y="2852928"/>
-            <a:ext cx="2560320" cy="822960"/>
+              <a:t>Healthcare &amp; Care Homes</a:t>
+            </a:r>
+            <a:endParaRPr lang="en-US" sz="1200" dirty="0"/>
+          </a:p>
+        </p:txBody>
+      </p:sp>
+      <p:sp>
+        <p:nvSpPr>
+          <p:cNvPr id="11" name="Text 9"/>
+          <p:cNvSpPr/>
+          <p:nvPr/>
+        </p:nvSpPr>
+        <p:spPr>
+          <a:xfrm>
+            <a:off x="3291840" y="1965960"/>
+            <a:ext cx="2606040" cy="548640"/>
           </a:xfrm>
           <a:prstGeom prst="rect">
             <a:avLst/>
@@ -2613,11 +2233,11 @@
           <a:bodyPr wrap="square" lIns="0" tIns="0" rIns="0" bIns="0" rtlCol="0" anchor="ctr"/>
           <a:lstStyle/>
           <a:p>
-            <a:pPr algn="ctr" indent="0" marL="0">
+            <a:pPr marL="0" indent="0" algn="ctr">
               <a:buNone/>
             </a:pPr>
             <a:r>
-              <a:rPr lang="en-US" sz="1100" dirty="0">
+              <a:rPr lang="en-US" sz="1000" dirty="0">
                 <a:solidFill>
                   <a:srgbClr val="FFFFFF"/>
                 </a:solidFill>
@@ -2625,22 +2245,22 @@
                 <a:ea typeface="Calibri" pitchFamily="34" charset="-122"/>
                 <a:cs typeface="Calibri" pitchFamily="34" charset="-120"/>
               </a:rPr>
-              <a:t>Auto-scans all available cameras — USB, built-in, or IP streams</a:t>
-            </a:r>
-            <a:endParaRPr lang="en-US" sz="1100" dirty="0"/>
-          </a:p>
-        </p:txBody>
-      </p:sp>
-      <p:sp>
-        <p:nvSpPr>
-          <p:cNvPr id="15" name="Shape 13"/>
-          <p:cNvSpPr/>
-          <p:nvPr/>
-        </p:nvSpPr>
-        <p:spPr>
-          <a:xfrm>
-            <a:off x="6126480" y="1508760"/>
-            <a:ext cx="2743200" cy="2377440"/>
+              <a:t>Patient fall detection, emergency response, staff efficiency</a:t>
+            </a:r>
+            <a:endParaRPr lang="en-US" sz="1000" dirty="0"/>
+          </a:p>
+        </p:txBody>
+      </p:sp>
+      <p:sp>
+        <p:nvSpPr>
+          <p:cNvPr id="12" name="Shape 10"/>
+          <p:cNvSpPr/>
+          <p:nvPr/>
+        </p:nvSpPr>
+        <p:spPr>
+          <a:xfrm>
+            <a:off x="6126480" y="1005840"/>
+            <a:ext cx="2788920" cy="1600200"/>
           </a:xfrm>
           <a:prstGeom prst="rect">
             <a:avLst/>
@@ -2648,20 +2268,141 @@
           <a:solidFill>
             <a:srgbClr val="1A2E42"/>
           </a:solidFill>
-          <a:ln w="12700">
+          <a:ln w="6350">
             <a:solidFill>
               <a:srgbClr val="00C9FF"/>
             </a:solidFill>
             <a:prstDash val="solid"/>
           </a:ln>
           <a:effectLst>
-            <a:outerShdw sx="100000" sy="100000" kx="0" ky="0" algn="bl" rotWithShape="0" blurRad="101600" dist="38100" dir="8100000">
+            <a:outerShdw blurRad="101600" dist="38100" dir="8100000" algn="bl" rotWithShape="0">
               <a:srgbClr val="000000">
                 <a:alpha val="20000"/>
               </a:srgbClr>
             </a:outerShdw>
           </a:effectLst>
         </p:spPr>
+        <p:txBody>
+          <a:bodyPr/>
+          <a:lstStyle/>
+          <a:p>
+            <a:endParaRPr lang="en-US"/>
+          </a:p>
+        </p:txBody>
+      </p:sp>
+      <p:sp>
+        <p:nvSpPr>
+          <p:cNvPr id="13" name="Text 11"/>
+          <p:cNvSpPr/>
+          <p:nvPr/>
+        </p:nvSpPr>
+        <p:spPr>
+          <a:xfrm>
+            <a:off x="6126480" y="1097280"/>
+            <a:ext cx="2788920" cy="502920"/>
+          </a:xfrm>
+          <a:prstGeom prst="rect">
+            <a:avLst/>
+          </a:prstGeom>
+          <a:noFill/>
+          <a:ln/>
+        </p:spPr>
+        <p:txBody>
+          <a:bodyPr wrap="square" rtlCol="0" anchor="ctr"/>
+          <a:lstStyle/>
+          <a:p>
+            <a:pPr marL="0" indent="0" algn="ctr">
+              <a:buNone/>
+            </a:pPr>
+            <a:r>
+              <a:rPr lang="en-US" sz="2400" dirty="0">
+                <a:solidFill>
+                  <a:srgbClr val="000000"/>
+                </a:solidFill>
+              </a:rPr>
+              <a:t>🏢</a:t>
+            </a:r>
+            <a:endParaRPr lang="en-US" sz="2400" dirty="0"/>
+          </a:p>
+        </p:txBody>
+      </p:sp>
+      <p:sp>
+        <p:nvSpPr>
+          <p:cNvPr id="14" name="Text 12"/>
+          <p:cNvSpPr/>
+          <p:nvPr/>
+        </p:nvSpPr>
+        <p:spPr>
+          <a:xfrm>
+            <a:off x="6217920" y="1627632"/>
+            <a:ext cx="2606040" cy="320040"/>
+          </a:xfrm>
+          <a:prstGeom prst="rect">
+            <a:avLst/>
+          </a:prstGeom>
+          <a:noFill/>
+          <a:ln/>
+        </p:spPr>
+        <p:txBody>
+          <a:bodyPr wrap="square" lIns="0" tIns="0" rIns="0" bIns="0" rtlCol="0" anchor="ctr"/>
+          <a:lstStyle/>
+          <a:p>
+            <a:pPr marL="0" indent="0" algn="ctr">
+              <a:buNone/>
+            </a:pPr>
+            <a:r>
+              <a:rPr lang="en-US" sz="1200" b="1" dirty="0">
+                <a:solidFill>
+                  <a:srgbClr val="00C9FF"/>
+                </a:solidFill>
+                <a:latin typeface="Calibri" pitchFamily="34" charset="0"/>
+                <a:ea typeface="Calibri" pitchFamily="34" charset="-122"/>
+                <a:cs typeface="Calibri" pitchFamily="34" charset="-120"/>
+              </a:rPr>
+              <a:t>Smart Buildings &amp; Facilities</a:t>
+            </a:r>
+            <a:endParaRPr lang="en-US" sz="1200" dirty="0"/>
+          </a:p>
+        </p:txBody>
+      </p:sp>
+      <p:sp>
+        <p:nvSpPr>
+          <p:cNvPr id="15" name="Text 13"/>
+          <p:cNvSpPr/>
+          <p:nvPr/>
+        </p:nvSpPr>
+        <p:spPr>
+          <a:xfrm>
+            <a:off x="6217920" y="1965960"/>
+            <a:ext cx="2606040" cy="548640"/>
+          </a:xfrm>
+          <a:prstGeom prst="rect">
+            <a:avLst/>
+          </a:prstGeom>
+          <a:noFill/>
+          <a:ln/>
+        </p:spPr>
+        <p:txBody>
+          <a:bodyPr wrap="square" lIns="0" tIns="0" rIns="0" bIns="0" rtlCol="0" anchor="ctr"/>
+          <a:lstStyle/>
+          <a:p>
+            <a:pPr marL="0" indent="0" algn="ctr">
+              <a:buNone/>
+            </a:pPr>
+            <a:r>
+              <a:rPr lang="en-US" sz="1000" dirty="0">
+                <a:solidFill>
+                  <a:srgbClr val="FFFFFF"/>
+                </a:solidFill>
+                <a:latin typeface="Calibri" pitchFamily="34" charset="0"/>
+                <a:ea typeface="Calibri" pitchFamily="34" charset="-122"/>
+                <a:cs typeface="Calibri" pitchFamily="34" charset="-120"/>
+              </a:rPr>
+              <a:t>Energy savings through occupancy-aware HVAC &amp; lighting</a:t>
+            </a:r>
+            <a:endParaRPr lang="en-US" sz="1000" dirty="0"/>
+          </a:p>
+        </p:txBody>
       </p:sp>
       <p:sp>
         <p:nvSpPr>
@@ -2671,22 +2412,36 @@
         </p:nvSpPr>
         <p:spPr>
           <a:xfrm>
-            <a:off x="6126480" y="1508760"/>
-            <a:ext cx="2743200" cy="73152"/>
-          </a:xfrm>
-          <a:prstGeom prst="rect">
-            <a:avLst/>
-          </a:prstGeom>
-          <a:solidFill>
-            <a:srgbClr val="00C9FF"/>
-          </a:solidFill>
-          <a:ln w="12700">
+            <a:off x="274320" y="2834640"/>
+            <a:ext cx="2788920" cy="1600200"/>
+          </a:xfrm>
+          <a:prstGeom prst="rect">
+            <a:avLst/>
+          </a:prstGeom>
+          <a:solidFill>
+            <a:srgbClr val="1A2E42"/>
+          </a:solidFill>
+          <a:ln w="6350">
             <a:solidFill>
               <a:srgbClr val="00C9FF"/>
             </a:solidFill>
             <a:prstDash val="solid"/>
           </a:ln>
-        </p:spPr>
+          <a:effectLst>
+            <a:outerShdw blurRad="101600" dist="38100" dir="8100000" algn="bl" rotWithShape="0">
+              <a:srgbClr val="000000">
+                <a:alpha val="20000"/>
+              </a:srgbClr>
+            </a:outerShdw>
+          </a:effectLst>
+        </p:spPr>
+        <p:txBody>
+          <a:bodyPr/>
+          <a:lstStyle/>
+          <a:p>
+            <a:endParaRPr lang="en-US"/>
+          </a:p>
+        </p:txBody>
       </p:sp>
       <p:sp>
         <p:nvSpPr>
@@ -2696,8 +2451,8 @@
         </p:nvSpPr>
         <p:spPr>
           <a:xfrm>
-            <a:off x="6126480" y="1691640"/>
-            <a:ext cx="2743200" cy="640080"/>
+            <a:off x="274320" y="2926080"/>
+            <a:ext cx="2788920" cy="502920"/>
           </a:xfrm>
           <a:prstGeom prst="rect">
             <a:avLst/>
@@ -2709,18 +2464,18 @@
           <a:bodyPr wrap="square" rtlCol="0" anchor="ctr"/>
           <a:lstStyle/>
           <a:p>
-            <a:pPr algn="ctr" indent="0" marL="0">
+            <a:pPr marL="0" indent="0" algn="ctr">
               <a:buNone/>
             </a:pPr>
             <a:r>
-              <a:rPr lang="en-US" sz="3200" dirty="0">
+              <a:rPr lang="en-US" sz="2400" dirty="0">
                 <a:solidFill>
                   <a:srgbClr val="000000"/>
                 </a:solidFill>
               </a:rPr>
-              <a:t>🔌</a:t>
-            </a:r>
-            <a:endParaRPr lang="en-US" sz="3200" dirty="0"/>
+              <a:t>🔒</a:t>
+            </a:r>
+            <a:endParaRPr lang="en-US" sz="2400" dirty="0"/>
           </a:p>
         </p:txBody>
       </p:sp>
@@ -2732,8 +2487,8 @@
         </p:nvSpPr>
         <p:spPr>
           <a:xfrm>
-            <a:off x="6217920" y="2423160"/>
-            <a:ext cx="2560320" cy="365760"/>
+            <a:off x="365760" y="3456432"/>
+            <a:ext cx="2606040" cy="320040"/>
           </a:xfrm>
           <a:prstGeom prst="rect">
             <a:avLst/>
@@ -2745,11 +2500,11 @@
           <a:bodyPr wrap="square" lIns="0" tIns="0" rIns="0" bIns="0" rtlCol="0" anchor="ctr"/>
           <a:lstStyle/>
           <a:p>
-            <a:pPr algn="ctr" indent="0" marL="0">
+            <a:pPr marL="0" indent="0" algn="ctr">
               <a:buNone/>
             </a:pPr>
             <a:r>
-              <a:rPr lang="en-US" sz="1300" b="1" dirty="0">
+              <a:rPr lang="en-US" sz="1200" b="1" dirty="0">
                 <a:solidFill>
                   <a:srgbClr val="00C9FF"/>
                 </a:solidFill>
@@ -2757,9 +2512,9 @@
                 <a:ea typeface="Calibri" pitchFamily="34" charset="-122"/>
                 <a:cs typeface="Calibri" pitchFamily="34" charset="-120"/>
               </a:rPr>
-              <a:t>GPIO Integration</a:t>
-            </a:r>
-            <a:endParaRPr lang="en-US" sz="1300" dirty="0"/>
+              <a:t>Security Firms</a:t>
+            </a:r>
+            <a:endParaRPr lang="en-US" sz="1200" dirty="0"/>
           </a:p>
         </p:txBody>
       </p:sp>
@@ -2771,8 +2526,8 @@
         </p:nvSpPr>
         <p:spPr>
           <a:xfrm>
-            <a:off x="6217920" y="2852928"/>
-            <a:ext cx="2560320" cy="822960"/>
+            <a:off x="365760" y="3794760"/>
+            <a:ext cx="2606040" cy="548640"/>
           </a:xfrm>
           <a:prstGeom prst="rect">
             <a:avLst/>
@@ -2784,11 +2539,11 @@
           <a:bodyPr wrap="square" lIns="0" tIns="0" rIns="0" bIns="0" rtlCol="0" anchor="ctr"/>
           <a:lstStyle/>
           <a:p>
-            <a:pPr algn="ctr" indent="0" marL="0">
+            <a:pPr marL="0" indent="0" algn="ctr">
               <a:buNone/>
             </a:pPr>
             <a:r>
-              <a:rPr lang="en-US" sz="1100" dirty="0">
+              <a:rPr lang="en-US" sz="1000" dirty="0">
                 <a:solidFill>
                   <a:srgbClr val="FFFFFF"/>
                 </a:solidFill>
@@ -2796,22 +2551,61 @@
                 <a:ea typeface="Calibri" pitchFamily="34" charset="-122"/>
                 <a:cs typeface="Calibri" pitchFamily="34" charset="-120"/>
               </a:rPr>
-              <a:t>Triggers physical outputs (LEDs, alarms) via Raspberry Pi GPIO pins</a:t>
-            </a:r>
-            <a:endParaRPr lang="en-US" sz="1100" dirty="0"/>
-          </a:p>
-        </p:txBody>
-      </p:sp>
-      <p:sp>
-        <p:nvSpPr>
-          <p:cNvPr id="20" name="Text 18"/>
-          <p:cNvSpPr/>
-          <p:nvPr/>
-        </p:nvSpPr>
-        <p:spPr>
-          <a:xfrm>
-            <a:off x="457200" y="4069080"/>
-            <a:ext cx="8229600" cy="320040"/>
+              <a:t>Low-cost AI camera upgrades replacing expensive sensor arrays</a:t>
+            </a:r>
+            <a:endParaRPr lang="en-US" sz="1000" dirty="0"/>
+          </a:p>
+        </p:txBody>
+      </p:sp>
+      <p:sp>
+        <p:nvSpPr>
+          <p:cNvPr id="20" name="Shape 18"/>
+          <p:cNvSpPr/>
+          <p:nvPr/>
+        </p:nvSpPr>
+        <p:spPr>
+          <a:xfrm>
+            <a:off x="3200400" y="2834640"/>
+            <a:ext cx="2788920" cy="1600200"/>
+          </a:xfrm>
+          <a:prstGeom prst="rect">
+            <a:avLst/>
+          </a:prstGeom>
+          <a:solidFill>
+            <a:srgbClr val="1A2E42"/>
+          </a:solidFill>
+          <a:ln w="6350">
+            <a:solidFill>
+              <a:srgbClr val="00C9FF"/>
+            </a:solidFill>
+            <a:prstDash val="solid"/>
+          </a:ln>
+          <a:effectLst>
+            <a:outerShdw blurRad="101600" dist="38100" dir="8100000" algn="bl" rotWithShape="0">
+              <a:srgbClr val="000000">
+                <a:alpha val="20000"/>
+              </a:srgbClr>
+            </a:outerShdw>
+          </a:effectLst>
+        </p:spPr>
+        <p:txBody>
+          <a:bodyPr/>
+          <a:lstStyle/>
+          <a:p>
+            <a:endParaRPr lang="en-US"/>
+          </a:p>
+        </p:txBody>
+      </p:sp>
+      <p:sp>
+        <p:nvSpPr>
+          <p:cNvPr id="21" name="Text 19"/>
+          <p:cNvSpPr/>
+          <p:nvPr/>
+        </p:nvSpPr>
+        <p:spPr>
+          <a:xfrm>
+            <a:off x="3200400" y="2926080"/>
+            <a:ext cx="2788920" cy="502920"/>
           </a:xfrm>
           <a:prstGeom prst="rect">
             <a:avLst/>
@@ -2823,21 +2617,249 @@
           <a:bodyPr wrap="square" rtlCol="0" anchor="ctr"/>
           <a:lstStyle/>
           <a:p>
-            <a:pPr algn="ctr" indent="0" marL="0">
+            <a:pPr marL="0" indent="0" algn="ctr">
               <a:buNone/>
             </a:pPr>
             <a:r>
-              <a:rPr lang="en-US" sz="1100" i="1" dirty="0">
-                <a:solidFill>
-                  <a:srgbClr val="94A3B8"/>
+              <a:rPr lang="en-US" sz="2400" dirty="0">
+                <a:solidFill>
+                  <a:srgbClr val="000000"/>
+                </a:solidFill>
+              </a:rPr>
+              <a:t>🎓</a:t>
+            </a:r>
+            <a:endParaRPr lang="en-US" sz="2400" dirty="0"/>
+          </a:p>
+        </p:txBody>
+      </p:sp>
+      <p:sp>
+        <p:nvSpPr>
+          <p:cNvPr id="22" name="Text 20"/>
+          <p:cNvSpPr/>
+          <p:nvPr/>
+        </p:nvSpPr>
+        <p:spPr>
+          <a:xfrm>
+            <a:off x="3291840" y="3456432"/>
+            <a:ext cx="2606040" cy="320040"/>
+          </a:xfrm>
+          <a:prstGeom prst="rect">
+            <a:avLst/>
+          </a:prstGeom>
+          <a:noFill/>
+          <a:ln/>
+        </p:spPr>
+        <p:txBody>
+          <a:bodyPr wrap="square" lIns="0" tIns="0" rIns="0" bIns="0" rtlCol="0" anchor="ctr"/>
+          <a:lstStyle/>
+          <a:p>
+            <a:pPr marL="0" indent="0" algn="ctr">
+              <a:buNone/>
+            </a:pPr>
+            <a:r>
+              <a:rPr lang="en-US" sz="1200" b="1" dirty="0">
+                <a:solidFill>
+                  <a:srgbClr val="00C9FF"/>
                 </a:solidFill>
                 <a:latin typeface="Calibri" pitchFamily="34" charset="0"/>
                 <a:ea typeface="Calibri" pitchFamily="34" charset="-122"/>
                 <a:cs typeface="Calibri" pitchFamily="34" charset="-120"/>
               </a:rPr>
-              <a:t>70%+ confidence threshold  ·  80 detectable object classes  ·  Open Source (MIT)</a:t>
-            </a:r>
-            <a:endParaRPr lang="en-US" sz="1100" dirty="0"/>
+              <a:t>Researchers &amp; Educators</a:t>
+            </a:r>
+            <a:endParaRPr lang="en-US" sz="1200" dirty="0"/>
+          </a:p>
+        </p:txBody>
+      </p:sp>
+      <p:sp>
+        <p:nvSpPr>
+          <p:cNvPr id="23" name="Text 21"/>
+          <p:cNvSpPr/>
+          <p:nvPr/>
+        </p:nvSpPr>
+        <p:spPr>
+          <a:xfrm>
+            <a:off x="3291840" y="3794760"/>
+            <a:ext cx="2606040" cy="548640"/>
+          </a:xfrm>
+          <a:prstGeom prst="rect">
+            <a:avLst/>
+          </a:prstGeom>
+          <a:noFill/>
+          <a:ln/>
+        </p:spPr>
+        <p:txBody>
+          <a:bodyPr wrap="square" lIns="0" tIns="0" rIns="0" bIns="0" rtlCol="0" anchor="ctr"/>
+          <a:lstStyle/>
+          <a:p>
+            <a:pPr marL="0" indent="0" algn="ctr">
+              <a:buNone/>
+            </a:pPr>
+            <a:r>
+              <a:rPr lang="en-US" sz="1000" dirty="0">
+                <a:solidFill>
+                  <a:srgbClr val="FFFFFF"/>
+                </a:solidFill>
+                <a:latin typeface="Calibri" pitchFamily="34" charset="0"/>
+                <a:ea typeface="Calibri" pitchFamily="34" charset="-122"/>
+                <a:cs typeface="Calibri" pitchFamily="34" charset="-120"/>
+              </a:rPr>
+              <a:t>Open-source platform for CV and IoT prototyping</a:t>
+            </a:r>
+            <a:endParaRPr lang="en-US" sz="1000" dirty="0"/>
+          </a:p>
+        </p:txBody>
+      </p:sp>
+      <p:sp>
+        <p:nvSpPr>
+          <p:cNvPr id="24" name="Shape 22"/>
+          <p:cNvSpPr/>
+          <p:nvPr/>
+        </p:nvSpPr>
+        <p:spPr>
+          <a:xfrm>
+            <a:off x="6126480" y="2834640"/>
+            <a:ext cx="2788920" cy="1600200"/>
+          </a:xfrm>
+          <a:prstGeom prst="rect">
+            <a:avLst/>
+          </a:prstGeom>
+          <a:solidFill>
+            <a:srgbClr val="1A2E42"/>
+          </a:solidFill>
+          <a:ln w="6350">
+            <a:solidFill>
+              <a:srgbClr val="00C9FF"/>
+            </a:solidFill>
+            <a:prstDash val="solid"/>
+          </a:ln>
+          <a:effectLst>
+            <a:outerShdw blurRad="101600" dist="38100" dir="8100000" algn="bl" rotWithShape="0">
+              <a:srgbClr val="000000">
+                <a:alpha val="20000"/>
+              </a:srgbClr>
+            </a:outerShdw>
+          </a:effectLst>
+        </p:spPr>
+        <p:txBody>
+          <a:bodyPr/>
+          <a:lstStyle/>
+          <a:p>
+            <a:endParaRPr lang="en-US"/>
+          </a:p>
+        </p:txBody>
+      </p:sp>
+      <p:sp>
+        <p:nvSpPr>
+          <p:cNvPr id="25" name="Text 23"/>
+          <p:cNvSpPr/>
+          <p:nvPr/>
+        </p:nvSpPr>
+        <p:spPr>
+          <a:xfrm>
+            <a:off x="6126480" y="2926080"/>
+            <a:ext cx="2788920" cy="502920"/>
+          </a:xfrm>
+          <a:prstGeom prst="rect">
+            <a:avLst/>
+          </a:prstGeom>
+          <a:noFill/>
+          <a:ln/>
+        </p:spPr>
+        <p:txBody>
+          <a:bodyPr wrap="square" rtlCol="0" anchor="ctr"/>
+          <a:lstStyle/>
+          <a:p>
+            <a:pPr marL="0" indent="0" algn="ctr">
+              <a:buNone/>
+            </a:pPr>
+            <a:r>
+              <a:rPr lang="en-US" sz="2400" dirty="0">
+                <a:solidFill>
+                  <a:srgbClr val="000000"/>
+                </a:solidFill>
+              </a:rPr>
+              <a:t>🏠</a:t>
+            </a:r>
+            <a:endParaRPr lang="en-US" sz="2400" dirty="0"/>
+          </a:p>
+        </p:txBody>
+      </p:sp>
+      <p:sp>
+        <p:nvSpPr>
+          <p:cNvPr id="26" name="Text 24"/>
+          <p:cNvSpPr/>
+          <p:nvPr/>
+        </p:nvSpPr>
+        <p:spPr>
+          <a:xfrm>
+            <a:off x="6217920" y="3456432"/>
+            <a:ext cx="2606040" cy="320040"/>
+          </a:xfrm>
+          <a:prstGeom prst="rect">
+            <a:avLst/>
+          </a:prstGeom>
+          <a:noFill/>
+          <a:ln/>
+        </p:spPr>
+        <p:txBody>
+          <a:bodyPr wrap="square" lIns="0" tIns="0" rIns="0" bIns="0" rtlCol="0" anchor="ctr"/>
+          <a:lstStyle/>
+          <a:p>
+            <a:pPr marL="0" indent="0" algn="ctr">
+              <a:buNone/>
+            </a:pPr>
+            <a:r>
+              <a:rPr lang="en-US" sz="1200" b="1" dirty="0">
+                <a:solidFill>
+                  <a:srgbClr val="00C9FF"/>
+                </a:solidFill>
+                <a:latin typeface="Calibri" pitchFamily="34" charset="0"/>
+                <a:ea typeface="Calibri" pitchFamily="34" charset="-122"/>
+                <a:cs typeface="Calibri" pitchFamily="34" charset="-120"/>
+              </a:rPr>
+              <a:t>Homeowners &amp; DIY Makers</a:t>
+            </a:r>
+            <a:endParaRPr lang="en-US" sz="1200" dirty="0"/>
+          </a:p>
+        </p:txBody>
+      </p:sp>
+      <p:sp>
+        <p:nvSpPr>
+          <p:cNvPr id="27" name="Text 25"/>
+          <p:cNvSpPr/>
+          <p:nvPr/>
+        </p:nvSpPr>
+        <p:spPr>
+          <a:xfrm>
+            <a:off x="6217920" y="3794760"/>
+            <a:ext cx="2606040" cy="548640"/>
+          </a:xfrm>
+          <a:prstGeom prst="rect">
+            <a:avLst/>
+          </a:prstGeom>
+          <a:noFill/>
+          <a:ln/>
+        </p:spPr>
+        <p:txBody>
+          <a:bodyPr wrap="square" lIns="0" tIns="0" rIns="0" bIns="0" rtlCol="0" anchor="ctr"/>
+          <a:lstStyle/>
+          <a:p>
+            <a:pPr marL="0" indent="0" algn="ctr">
+              <a:buNone/>
+            </a:pPr>
+            <a:r>
+              <a:rPr lang="en-US" sz="1000" dirty="0">
+                <a:solidFill>
+                  <a:srgbClr val="FFFFFF"/>
+                </a:solidFill>
+                <a:latin typeface="Calibri" pitchFamily="34" charset="0"/>
+                <a:ea typeface="Calibri" pitchFamily="34" charset="-122"/>
+                <a:cs typeface="Calibri" pitchFamily="34" charset="-120"/>
+              </a:rPr>
+              <a:t>Affordable Raspberry Pi-based home automation and security</a:t>
+            </a:r>
+            <a:endParaRPr lang="en-US" sz="1000" dirty="0"/>
           </a:p>
         </p:txBody>
       </p:sp>
@@ -2851,12 +2873,13 @@
 
 <file path=ppt/slides/slide4.xml><?xml version="1.0" encoding="utf-8"?>
 <p:sld xmlns:a="http://schemas.openxmlformats.org/drawingml/2006/main" xmlns:r="http://schemas.openxmlformats.org/officeDocument/2006/relationships" xmlns:p="http://schemas.openxmlformats.org/presentationml/2006/main">
-  <p:cSld name="Slide 4">
+  <p:cSld name="Slide 5">
     <p:bg>
       <p:bgPr>
         <a:solidFill>
           <a:srgbClr val="0D1B2A"/>
         </a:solidFill>
+        <a:effectLst/>
       </p:bgPr>
     </p:bg>
     <p:spTree>
@@ -2897,6 +2920,13 @@
             <a:prstDash val="solid"/>
           </a:ln>
         </p:spPr>
+        <p:txBody>
+          <a:bodyPr/>
+          <a:lstStyle/>
+          <a:p>
+            <a:endParaRPr lang="en-US"/>
+          </a:p>
+        </p:txBody>
       </p:sp>
       <p:sp>
         <p:nvSpPr>
@@ -2919,11 +2949,11 @@
           <a:bodyPr wrap="square" rtlCol="0" anchor="ctr"/>
           <a:lstStyle/>
           <a:p>
-            <a:pPr indent="0" marL="0">
+            <a:pPr marL="0" indent="0">
               <a:buNone/>
             </a:pPr>
             <a:r>
-              <a:rPr lang="en-US" sz="2600" b="1" spc="200" kern="0" dirty="0">
+              <a:rPr lang="en-US" sz="2600" b="1" kern="0" spc="200" dirty="0">
                 <a:solidFill>
                   <a:srgbClr val="FFFFFF"/>
                 </a:solidFill>
@@ -2931,7 +2961,7 @@
                 <a:ea typeface="Arial Black" pitchFamily="34" charset="-122"/>
                 <a:cs typeface="Arial Black" pitchFamily="34" charset="-120"/>
               </a:rPr>
-              <a:t>WHO BENEFITS?</a:t>
+              <a:t>HOW IT WORKS</a:t>
             </a:r>
             <a:endParaRPr lang="en-US" sz="2600" dirty="0"/>
           </a:p>
@@ -2945,916 +2975,8 @@
         </p:nvSpPr>
         <p:spPr>
           <a:xfrm>
-            <a:off x="274320" y="1005840"/>
-            <a:ext cx="2788920" cy="1600200"/>
-          </a:xfrm>
-          <a:prstGeom prst="rect">
-            <a:avLst/>
-          </a:prstGeom>
-          <a:solidFill>
-            <a:srgbClr val="1A2E42"/>
-          </a:solidFill>
-          <a:ln w="6350">
-            <a:solidFill>
-              <a:srgbClr val="00C9FF"/>
-            </a:solidFill>
-            <a:prstDash val="solid"/>
-          </a:ln>
-          <a:effectLst>
-            <a:outerShdw sx="100000" sy="100000" kx="0" ky="0" algn="bl" rotWithShape="0" blurRad="101600" dist="38100" dir="8100000">
-              <a:srgbClr val="000000">
-                <a:alpha val="20000"/>
-              </a:srgbClr>
-            </a:outerShdw>
-          </a:effectLst>
-        </p:spPr>
-      </p:sp>
-      <p:sp>
-        <p:nvSpPr>
-          <p:cNvPr id="5" name="Text 3"/>
-          <p:cNvSpPr/>
-          <p:nvPr/>
-        </p:nvSpPr>
-        <p:spPr>
-          <a:xfrm>
-            <a:off x="274320" y="1097280"/>
-            <a:ext cx="2788920" cy="502920"/>
-          </a:xfrm>
-          <a:prstGeom prst="rect">
-            <a:avLst/>
-          </a:prstGeom>
-          <a:noFill/>
-          <a:ln/>
-        </p:spPr>
-        <p:txBody>
-          <a:bodyPr wrap="square" rtlCol="0" anchor="ctr"/>
-          <a:lstStyle/>
-          <a:p>
-            <a:pPr algn="ctr" indent="0" marL="0">
-              <a:buNone/>
-            </a:pPr>
-            <a:r>
-              <a:rPr lang="en-US" sz="2400" dirty="0">
-                <a:solidFill>
-                  <a:srgbClr val="000000"/>
-                </a:solidFill>
-              </a:rPr>
-              <a:t>🏭</a:t>
-            </a:r>
-            <a:endParaRPr lang="en-US" sz="2400" dirty="0"/>
-          </a:p>
-        </p:txBody>
-      </p:sp>
-      <p:sp>
-        <p:nvSpPr>
-          <p:cNvPr id="6" name="Text 4"/>
-          <p:cNvSpPr/>
-          <p:nvPr/>
-        </p:nvSpPr>
-        <p:spPr>
-          <a:xfrm>
-            <a:off x="365760" y="1627632"/>
-            <a:ext cx="2606040" cy="320040"/>
-          </a:xfrm>
-          <a:prstGeom prst="rect">
-            <a:avLst/>
-          </a:prstGeom>
-          <a:noFill/>
-          <a:ln/>
-        </p:spPr>
-        <p:txBody>
-          <a:bodyPr wrap="square" lIns="0" tIns="0" rIns="0" bIns="0" rtlCol="0" anchor="ctr"/>
-          <a:lstStyle/>
-          <a:p>
-            <a:pPr algn="ctr" indent="0" marL="0">
-              <a:buNone/>
-            </a:pPr>
-            <a:r>
-              <a:rPr lang="en-US" sz="1200" b="1" dirty="0">
-                <a:solidFill>
-                  <a:srgbClr val="00C9FF"/>
-                </a:solidFill>
-                <a:latin typeface="Calibri" pitchFamily="34" charset="0"/>
-                <a:ea typeface="Calibri" pitchFamily="34" charset="-122"/>
-                <a:cs typeface="Calibri" pitchFamily="34" charset="-120"/>
-              </a:rPr>
-              <a:t>Industrial &amp; Manufacturing</a:t>
-            </a:r>
-            <a:endParaRPr lang="en-US" sz="1200" dirty="0"/>
-          </a:p>
-        </p:txBody>
-      </p:sp>
-      <p:sp>
-        <p:nvSpPr>
-          <p:cNvPr id="7" name="Text 5"/>
-          <p:cNvSpPr/>
-          <p:nvPr/>
-        </p:nvSpPr>
-        <p:spPr>
-          <a:xfrm>
-            <a:off x="365760" y="1965960"/>
-            <a:ext cx="2606040" cy="548640"/>
-          </a:xfrm>
-          <a:prstGeom prst="rect">
-            <a:avLst/>
-          </a:prstGeom>
-          <a:noFill/>
-          <a:ln/>
-        </p:spPr>
-        <p:txBody>
-          <a:bodyPr wrap="square" lIns="0" tIns="0" rIns="0" bIns="0" rtlCol="0" anchor="ctr"/>
-          <a:lstStyle/>
-          <a:p>
-            <a:pPr algn="ctr" indent="0" marL="0">
-              <a:buNone/>
-            </a:pPr>
-            <a:r>
-              <a:rPr lang="en-US" sz="1000" dirty="0">
-                <a:solidFill>
-                  <a:srgbClr val="FFFFFF"/>
-                </a:solidFill>
-                <a:latin typeface="Calibri" pitchFamily="34" charset="0"/>
-                <a:ea typeface="Calibri" pitchFamily="34" charset="-122"/>
-                <a:cs typeface="Calibri" pitchFamily="34" charset="-120"/>
-              </a:rPr>
-              <a:t>Safety compliance, restricted zone monitoring, accident prevention</a:t>
-            </a:r>
-            <a:endParaRPr lang="en-US" sz="1000" dirty="0"/>
-          </a:p>
-        </p:txBody>
-      </p:sp>
-      <p:sp>
-        <p:nvSpPr>
-          <p:cNvPr id="8" name="Shape 6"/>
-          <p:cNvSpPr/>
-          <p:nvPr/>
-        </p:nvSpPr>
-        <p:spPr>
-          <a:xfrm>
-            <a:off x="3200400" y="1005840"/>
-            <a:ext cx="2788920" cy="1600200"/>
-          </a:xfrm>
-          <a:prstGeom prst="rect">
-            <a:avLst/>
-          </a:prstGeom>
-          <a:solidFill>
-            <a:srgbClr val="1A2E42"/>
-          </a:solidFill>
-          <a:ln w="6350">
-            <a:solidFill>
-              <a:srgbClr val="00C9FF"/>
-            </a:solidFill>
-            <a:prstDash val="solid"/>
-          </a:ln>
-          <a:effectLst>
-            <a:outerShdw sx="100000" sy="100000" kx="0" ky="0" algn="bl" rotWithShape="0" blurRad="101600" dist="38100" dir="8100000">
-              <a:srgbClr val="000000">
-                <a:alpha val="20000"/>
-              </a:srgbClr>
-            </a:outerShdw>
-          </a:effectLst>
-        </p:spPr>
-      </p:sp>
-      <p:sp>
-        <p:nvSpPr>
-          <p:cNvPr id="9" name="Text 7"/>
-          <p:cNvSpPr/>
-          <p:nvPr/>
-        </p:nvSpPr>
-        <p:spPr>
-          <a:xfrm>
-            <a:off x="3200400" y="1097280"/>
-            <a:ext cx="2788920" cy="502920"/>
-          </a:xfrm>
-          <a:prstGeom prst="rect">
-            <a:avLst/>
-          </a:prstGeom>
-          <a:noFill/>
-          <a:ln/>
-        </p:spPr>
-        <p:txBody>
-          <a:bodyPr wrap="square" rtlCol="0" anchor="ctr"/>
-          <a:lstStyle/>
-          <a:p>
-            <a:pPr algn="ctr" indent="0" marL="0">
-              <a:buNone/>
-            </a:pPr>
-            <a:r>
-              <a:rPr lang="en-US" sz="2400" dirty="0">
-                <a:solidFill>
-                  <a:srgbClr val="000000"/>
-                </a:solidFill>
-              </a:rPr>
-              <a:t>🏥</a:t>
-            </a:r>
-            <a:endParaRPr lang="en-US" sz="2400" dirty="0"/>
-          </a:p>
-        </p:txBody>
-      </p:sp>
-      <p:sp>
-        <p:nvSpPr>
-          <p:cNvPr id="10" name="Text 8"/>
-          <p:cNvSpPr/>
-          <p:nvPr/>
-        </p:nvSpPr>
-        <p:spPr>
-          <a:xfrm>
-            <a:off x="3291840" y="1627632"/>
-            <a:ext cx="2606040" cy="320040"/>
-          </a:xfrm>
-          <a:prstGeom prst="rect">
-            <a:avLst/>
-          </a:prstGeom>
-          <a:noFill/>
-          <a:ln/>
-        </p:spPr>
-        <p:txBody>
-          <a:bodyPr wrap="square" lIns="0" tIns="0" rIns="0" bIns="0" rtlCol="0" anchor="ctr"/>
-          <a:lstStyle/>
-          <a:p>
-            <a:pPr algn="ctr" indent="0" marL="0">
-              <a:buNone/>
-            </a:pPr>
-            <a:r>
-              <a:rPr lang="en-US" sz="1200" b="1" dirty="0">
-                <a:solidFill>
-                  <a:srgbClr val="00C9FF"/>
-                </a:solidFill>
-                <a:latin typeface="Calibri" pitchFamily="34" charset="0"/>
-                <a:ea typeface="Calibri" pitchFamily="34" charset="-122"/>
-                <a:cs typeface="Calibri" pitchFamily="34" charset="-120"/>
-              </a:rPr>
-              <a:t>Healthcare &amp; Care Homes</a:t>
-            </a:r>
-            <a:endParaRPr lang="en-US" sz="1200" dirty="0"/>
-          </a:p>
-        </p:txBody>
-      </p:sp>
-      <p:sp>
-        <p:nvSpPr>
-          <p:cNvPr id="11" name="Text 9"/>
-          <p:cNvSpPr/>
-          <p:nvPr/>
-        </p:nvSpPr>
-        <p:spPr>
-          <a:xfrm>
-            <a:off x="3291840" y="1965960"/>
-            <a:ext cx="2606040" cy="548640"/>
-          </a:xfrm>
-          <a:prstGeom prst="rect">
-            <a:avLst/>
-          </a:prstGeom>
-          <a:noFill/>
-          <a:ln/>
-        </p:spPr>
-        <p:txBody>
-          <a:bodyPr wrap="square" lIns="0" tIns="0" rIns="0" bIns="0" rtlCol="0" anchor="ctr"/>
-          <a:lstStyle/>
-          <a:p>
-            <a:pPr algn="ctr" indent="0" marL="0">
-              <a:buNone/>
-            </a:pPr>
-            <a:r>
-              <a:rPr lang="en-US" sz="1000" dirty="0">
-                <a:solidFill>
-                  <a:srgbClr val="FFFFFF"/>
-                </a:solidFill>
-                <a:latin typeface="Calibri" pitchFamily="34" charset="0"/>
-                <a:ea typeface="Calibri" pitchFamily="34" charset="-122"/>
-                <a:cs typeface="Calibri" pitchFamily="34" charset="-120"/>
-              </a:rPr>
-              <a:t>Patient fall detection, emergency response, staff efficiency</a:t>
-            </a:r>
-            <a:endParaRPr lang="en-US" sz="1000" dirty="0"/>
-          </a:p>
-        </p:txBody>
-      </p:sp>
-      <p:sp>
-        <p:nvSpPr>
-          <p:cNvPr id="12" name="Shape 10"/>
-          <p:cNvSpPr/>
-          <p:nvPr/>
-        </p:nvSpPr>
-        <p:spPr>
-          <a:xfrm>
-            <a:off x="6126480" y="1005840"/>
-            <a:ext cx="2788920" cy="1600200"/>
-          </a:xfrm>
-          <a:prstGeom prst="rect">
-            <a:avLst/>
-          </a:prstGeom>
-          <a:solidFill>
-            <a:srgbClr val="1A2E42"/>
-          </a:solidFill>
-          <a:ln w="6350">
-            <a:solidFill>
-              <a:srgbClr val="00C9FF"/>
-            </a:solidFill>
-            <a:prstDash val="solid"/>
-          </a:ln>
-          <a:effectLst>
-            <a:outerShdw sx="100000" sy="100000" kx="0" ky="0" algn="bl" rotWithShape="0" blurRad="101600" dist="38100" dir="8100000">
-              <a:srgbClr val="000000">
-                <a:alpha val="20000"/>
-              </a:srgbClr>
-            </a:outerShdw>
-          </a:effectLst>
-        </p:spPr>
-      </p:sp>
-      <p:sp>
-        <p:nvSpPr>
-          <p:cNvPr id="13" name="Text 11"/>
-          <p:cNvSpPr/>
-          <p:nvPr/>
-        </p:nvSpPr>
-        <p:spPr>
-          <a:xfrm>
-            <a:off x="6126480" y="1097280"/>
-            <a:ext cx="2788920" cy="502920"/>
-          </a:xfrm>
-          <a:prstGeom prst="rect">
-            <a:avLst/>
-          </a:prstGeom>
-          <a:noFill/>
-          <a:ln/>
-        </p:spPr>
-        <p:txBody>
-          <a:bodyPr wrap="square" rtlCol="0" anchor="ctr"/>
-          <a:lstStyle/>
-          <a:p>
-            <a:pPr algn="ctr" indent="0" marL="0">
-              <a:buNone/>
-            </a:pPr>
-            <a:r>
-              <a:rPr lang="en-US" sz="2400" dirty="0">
-                <a:solidFill>
-                  <a:srgbClr val="000000"/>
-                </a:solidFill>
-              </a:rPr>
-              <a:t>🏢</a:t>
-            </a:r>
-            <a:endParaRPr lang="en-US" sz="2400" dirty="0"/>
-          </a:p>
-        </p:txBody>
-      </p:sp>
-      <p:sp>
-        <p:nvSpPr>
-          <p:cNvPr id="14" name="Text 12"/>
-          <p:cNvSpPr/>
-          <p:nvPr/>
-        </p:nvSpPr>
-        <p:spPr>
-          <a:xfrm>
-            <a:off x="6217920" y="1627632"/>
-            <a:ext cx="2606040" cy="320040"/>
-          </a:xfrm>
-          <a:prstGeom prst="rect">
-            <a:avLst/>
-          </a:prstGeom>
-          <a:noFill/>
-          <a:ln/>
-        </p:spPr>
-        <p:txBody>
-          <a:bodyPr wrap="square" lIns="0" tIns="0" rIns="0" bIns="0" rtlCol="0" anchor="ctr"/>
-          <a:lstStyle/>
-          <a:p>
-            <a:pPr algn="ctr" indent="0" marL="0">
-              <a:buNone/>
-            </a:pPr>
-            <a:r>
-              <a:rPr lang="en-US" sz="1200" b="1" dirty="0">
-                <a:solidFill>
-                  <a:srgbClr val="00C9FF"/>
-                </a:solidFill>
-                <a:latin typeface="Calibri" pitchFamily="34" charset="0"/>
-                <a:ea typeface="Calibri" pitchFamily="34" charset="-122"/>
-                <a:cs typeface="Calibri" pitchFamily="34" charset="-120"/>
-              </a:rPr>
-              <a:t>Smart Buildings &amp; Facilities</a:t>
-            </a:r>
-            <a:endParaRPr lang="en-US" sz="1200" dirty="0"/>
-          </a:p>
-        </p:txBody>
-      </p:sp>
-      <p:sp>
-        <p:nvSpPr>
-          <p:cNvPr id="15" name="Text 13"/>
-          <p:cNvSpPr/>
-          <p:nvPr/>
-        </p:nvSpPr>
-        <p:spPr>
-          <a:xfrm>
-            <a:off x="6217920" y="1965960"/>
-            <a:ext cx="2606040" cy="548640"/>
-          </a:xfrm>
-          <a:prstGeom prst="rect">
-            <a:avLst/>
-          </a:prstGeom>
-          <a:noFill/>
-          <a:ln/>
-        </p:spPr>
-        <p:txBody>
-          <a:bodyPr wrap="square" lIns="0" tIns="0" rIns="0" bIns="0" rtlCol="0" anchor="ctr"/>
-          <a:lstStyle/>
-          <a:p>
-            <a:pPr algn="ctr" indent="0" marL="0">
-              <a:buNone/>
-            </a:pPr>
-            <a:r>
-              <a:rPr lang="en-US" sz="1000" dirty="0">
-                <a:solidFill>
-                  <a:srgbClr val="FFFFFF"/>
-                </a:solidFill>
-                <a:latin typeface="Calibri" pitchFamily="34" charset="0"/>
-                <a:ea typeface="Calibri" pitchFamily="34" charset="-122"/>
-                <a:cs typeface="Calibri" pitchFamily="34" charset="-120"/>
-              </a:rPr>
-              <a:t>Energy savings through occupancy-aware HVAC &amp; lighting</a:t>
-            </a:r>
-            <a:endParaRPr lang="en-US" sz="1000" dirty="0"/>
-          </a:p>
-        </p:txBody>
-      </p:sp>
-      <p:sp>
-        <p:nvSpPr>
-          <p:cNvPr id="16" name="Shape 14"/>
-          <p:cNvSpPr/>
-          <p:nvPr/>
-        </p:nvSpPr>
-        <p:spPr>
-          <a:xfrm>
-            <a:off x="274320" y="2834640"/>
-            <a:ext cx="2788920" cy="1600200"/>
-          </a:xfrm>
-          <a:prstGeom prst="rect">
-            <a:avLst/>
-          </a:prstGeom>
-          <a:solidFill>
-            <a:srgbClr val="1A2E42"/>
-          </a:solidFill>
-          <a:ln w="6350">
-            <a:solidFill>
-              <a:srgbClr val="00C9FF"/>
-            </a:solidFill>
-            <a:prstDash val="solid"/>
-          </a:ln>
-          <a:effectLst>
-            <a:outerShdw sx="100000" sy="100000" kx="0" ky="0" algn="bl" rotWithShape="0" blurRad="101600" dist="38100" dir="8100000">
-              <a:srgbClr val="000000">
-                <a:alpha val="20000"/>
-              </a:srgbClr>
-            </a:outerShdw>
-          </a:effectLst>
-        </p:spPr>
-      </p:sp>
-      <p:sp>
-        <p:nvSpPr>
-          <p:cNvPr id="17" name="Text 15"/>
-          <p:cNvSpPr/>
-          <p:nvPr/>
-        </p:nvSpPr>
-        <p:spPr>
-          <a:xfrm>
-            <a:off x="274320" y="2926080"/>
-            <a:ext cx="2788920" cy="502920"/>
-          </a:xfrm>
-          <a:prstGeom prst="rect">
-            <a:avLst/>
-          </a:prstGeom>
-          <a:noFill/>
-          <a:ln/>
-        </p:spPr>
-        <p:txBody>
-          <a:bodyPr wrap="square" rtlCol="0" anchor="ctr"/>
-          <a:lstStyle/>
-          <a:p>
-            <a:pPr algn="ctr" indent="0" marL="0">
-              <a:buNone/>
-            </a:pPr>
-            <a:r>
-              <a:rPr lang="en-US" sz="2400" dirty="0">
-                <a:solidFill>
-                  <a:srgbClr val="000000"/>
-                </a:solidFill>
-              </a:rPr>
-              <a:t>🔒</a:t>
-            </a:r>
-            <a:endParaRPr lang="en-US" sz="2400" dirty="0"/>
-          </a:p>
-        </p:txBody>
-      </p:sp>
-      <p:sp>
-        <p:nvSpPr>
-          <p:cNvPr id="18" name="Text 16"/>
-          <p:cNvSpPr/>
-          <p:nvPr/>
-        </p:nvSpPr>
-        <p:spPr>
-          <a:xfrm>
-            <a:off x="365760" y="3456432"/>
-            <a:ext cx="2606040" cy="320040"/>
-          </a:xfrm>
-          <a:prstGeom prst="rect">
-            <a:avLst/>
-          </a:prstGeom>
-          <a:noFill/>
-          <a:ln/>
-        </p:spPr>
-        <p:txBody>
-          <a:bodyPr wrap="square" lIns="0" tIns="0" rIns="0" bIns="0" rtlCol="0" anchor="ctr"/>
-          <a:lstStyle/>
-          <a:p>
-            <a:pPr algn="ctr" indent="0" marL="0">
-              <a:buNone/>
-            </a:pPr>
-            <a:r>
-              <a:rPr lang="en-US" sz="1200" b="1" dirty="0">
-                <a:solidFill>
-                  <a:srgbClr val="00C9FF"/>
-                </a:solidFill>
-                <a:latin typeface="Calibri" pitchFamily="34" charset="0"/>
-                <a:ea typeface="Calibri" pitchFamily="34" charset="-122"/>
-                <a:cs typeface="Calibri" pitchFamily="34" charset="-120"/>
-              </a:rPr>
-              <a:t>Security Firms</a:t>
-            </a:r>
-            <a:endParaRPr lang="en-US" sz="1200" dirty="0"/>
-          </a:p>
-        </p:txBody>
-      </p:sp>
-      <p:sp>
-        <p:nvSpPr>
-          <p:cNvPr id="19" name="Text 17"/>
-          <p:cNvSpPr/>
-          <p:nvPr/>
-        </p:nvSpPr>
-        <p:spPr>
-          <a:xfrm>
-            <a:off x="365760" y="3794760"/>
-            <a:ext cx="2606040" cy="548640"/>
-          </a:xfrm>
-          <a:prstGeom prst="rect">
-            <a:avLst/>
-          </a:prstGeom>
-          <a:noFill/>
-          <a:ln/>
-        </p:spPr>
-        <p:txBody>
-          <a:bodyPr wrap="square" lIns="0" tIns="0" rIns="0" bIns="0" rtlCol="0" anchor="ctr"/>
-          <a:lstStyle/>
-          <a:p>
-            <a:pPr algn="ctr" indent="0" marL="0">
-              <a:buNone/>
-            </a:pPr>
-            <a:r>
-              <a:rPr lang="en-US" sz="1000" dirty="0">
-                <a:solidFill>
-                  <a:srgbClr val="FFFFFF"/>
-                </a:solidFill>
-                <a:latin typeface="Calibri" pitchFamily="34" charset="0"/>
-                <a:ea typeface="Calibri" pitchFamily="34" charset="-122"/>
-                <a:cs typeface="Calibri" pitchFamily="34" charset="-120"/>
-              </a:rPr>
-              <a:t>Low-cost AI camera upgrades replacing expensive sensor arrays</a:t>
-            </a:r>
-            <a:endParaRPr lang="en-US" sz="1000" dirty="0"/>
-          </a:p>
-        </p:txBody>
-      </p:sp>
-      <p:sp>
-        <p:nvSpPr>
-          <p:cNvPr id="20" name="Shape 18"/>
-          <p:cNvSpPr/>
-          <p:nvPr/>
-        </p:nvSpPr>
-        <p:spPr>
-          <a:xfrm>
-            <a:off x="3200400" y="2834640"/>
-            <a:ext cx="2788920" cy="1600200"/>
-          </a:xfrm>
-          <a:prstGeom prst="rect">
-            <a:avLst/>
-          </a:prstGeom>
-          <a:solidFill>
-            <a:srgbClr val="1A2E42"/>
-          </a:solidFill>
-          <a:ln w="6350">
-            <a:solidFill>
-              <a:srgbClr val="00C9FF"/>
-            </a:solidFill>
-            <a:prstDash val="solid"/>
-          </a:ln>
-          <a:effectLst>
-            <a:outerShdw sx="100000" sy="100000" kx="0" ky="0" algn="bl" rotWithShape="0" blurRad="101600" dist="38100" dir="8100000">
-              <a:srgbClr val="000000">
-                <a:alpha val="20000"/>
-              </a:srgbClr>
-            </a:outerShdw>
-          </a:effectLst>
-        </p:spPr>
-      </p:sp>
-      <p:sp>
-        <p:nvSpPr>
-          <p:cNvPr id="21" name="Text 19"/>
-          <p:cNvSpPr/>
-          <p:nvPr/>
-        </p:nvSpPr>
-        <p:spPr>
-          <a:xfrm>
-            <a:off x="3200400" y="2926080"/>
-            <a:ext cx="2788920" cy="502920"/>
-          </a:xfrm>
-          <a:prstGeom prst="rect">
-            <a:avLst/>
-          </a:prstGeom>
-          <a:noFill/>
-          <a:ln/>
-        </p:spPr>
-        <p:txBody>
-          <a:bodyPr wrap="square" rtlCol="0" anchor="ctr"/>
-          <a:lstStyle/>
-          <a:p>
-            <a:pPr algn="ctr" indent="0" marL="0">
-              <a:buNone/>
-            </a:pPr>
-            <a:r>
-              <a:rPr lang="en-US" sz="2400" dirty="0">
-                <a:solidFill>
-                  <a:srgbClr val="000000"/>
-                </a:solidFill>
-              </a:rPr>
-              <a:t>🎓</a:t>
-            </a:r>
-            <a:endParaRPr lang="en-US" sz="2400" dirty="0"/>
-          </a:p>
-        </p:txBody>
-      </p:sp>
-      <p:sp>
-        <p:nvSpPr>
-          <p:cNvPr id="22" name="Text 20"/>
-          <p:cNvSpPr/>
-          <p:nvPr/>
-        </p:nvSpPr>
-        <p:spPr>
-          <a:xfrm>
-            <a:off x="3291840" y="3456432"/>
-            <a:ext cx="2606040" cy="320040"/>
-          </a:xfrm>
-          <a:prstGeom prst="rect">
-            <a:avLst/>
-          </a:prstGeom>
-          <a:noFill/>
-          <a:ln/>
-        </p:spPr>
-        <p:txBody>
-          <a:bodyPr wrap="square" lIns="0" tIns="0" rIns="0" bIns="0" rtlCol="0" anchor="ctr"/>
-          <a:lstStyle/>
-          <a:p>
-            <a:pPr algn="ctr" indent="0" marL="0">
-              <a:buNone/>
-            </a:pPr>
-            <a:r>
-              <a:rPr lang="en-US" sz="1200" b="1" dirty="0">
-                <a:solidFill>
-                  <a:srgbClr val="00C9FF"/>
-                </a:solidFill>
-                <a:latin typeface="Calibri" pitchFamily="34" charset="0"/>
-                <a:ea typeface="Calibri" pitchFamily="34" charset="-122"/>
-                <a:cs typeface="Calibri" pitchFamily="34" charset="-120"/>
-              </a:rPr>
-              <a:t>Researchers &amp; Educators</a:t>
-            </a:r>
-            <a:endParaRPr lang="en-US" sz="1200" dirty="0"/>
-          </a:p>
-        </p:txBody>
-      </p:sp>
-      <p:sp>
-        <p:nvSpPr>
-          <p:cNvPr id="23" name="Text 21"/>
-          <p:cNvSpPr/>
-          <p:nvPr/>
-        </p:nvSpPr>
-        <p:spPr>
-          <a:xfrm>
-            <a:off x="3291840" y="3794760"/>
-            <a:ext cx="2606040" cy="548640"/>
-          </a:xfrm>
-          <a:prstGeom prst="rect">
-            <a:avLst/>
-          </a:prstGeom>
-          <a:noFill/>
-          <a:ln/>
-        </p:spPr>
-        <p:txBody>
-          <a:bodyPr wrap="square" lIns="0" tIns="0" rIns="0" bIns="0" rtlCol="0" anchor="ctr"/>
-          <a:lstStyle/>
-          <a:p>
-            <a:pPr algn="ctr" indent="0" marL="0">
-              <a:buNone/>
-            </a:pPr>
-            <a:r>
-              <a:rPr lang="en-US" sz="1000" dirty="0">
-                <a:solidFill>
-                  <a:srgbClr val="FFFFFF"/>
-                </a:solidFill>
-                <a:latin typeface="Calibri" pitchFamily="34" charset="0"/>
-                <a:ea typeface="Calibri" pitchFamily="34" charset="-122"/>
-                <a:cs typeface="Calibri" pitchFamily="34" charset="-120"/>
-              </a:rPr>
-              <a:t>Open-source platform for CV and IoT prototyping</a:t>
-            </a:r>
-            <a:endParaRPr lang="en-US" sz="1000" dirty="0"/>
-          </a:p>
-        </p:txBody>
-      </p:sp>
-      <p:sp>
-        <p:nvSpPr>
-          <p:cNvPr id="24" name="Shape 22"/>
-          <p:cNvSpPr/>
-          <p:nvPr/>
-        </p:nvSpPr>
-        <p:spPr>
-          <a:xfrm>
-            <a:off x="6126480" y="2834640"/>
-            <a:ext cx="2788920" cy="1600200"/>
-          </a:xfrm>
-          <a:prstGeom prst="rect">
-            <a:avLst/>
-          </a:prstGeom>
-          <a:solidFill>
-            <a:srgbClr val="1A2E42"/>
-          </a:solidFill>
-          <a:ln w="6350">
-            <a:solidFill>
-              <a:srgbClr val="00C9FF"/>
-            </a:solidFill>
-            <a:prstDash val="solid"/>
-          </a:ln>
-          <a:effectLst>
-            <a:outerShdw sx="100000" sy="100000" kx="0" ky="0" algn="bl" rotWithShape="0" blurRad="101600" dist="38100" dir="8100000">
-              <a:srgbClr val="000000">
-                <a:alpha val="20000"/>
-              </a:srgbClr>
-            </a:outerShdw>
-          </a:effectLst>
-        </p:spPr>
-      </p:sp>
-      <p:sp>
-        <p:nvSpPr>
-          <p:cNvPr id="25" name="Text 23"/>
-          <p:cNvSpPr/>
-          <p:nvPr/>
-        </p:nvSpPr>
-        <p:spPr>
-          <a:xfrm>
-            <a:off x="6126480" y="2926080"/>
-            <a:ext cx="2788920" cy="502920"/>
-          </a:xfrm>
-          <a:prstGeom prst="rect">
-            <a:avLst/>
-          </a:prstGeom>
-          <a:noFill/>
-          <a:ln/>
-        </p:spPr>
-        <p:txBody>
-          <a:bodyPr wrap="square" rtlCol="0" anchor="ctr"/>
-          <a:lstStyle/>
-          <a:p>
-            <a:pPr algn="ctr" indent="0" marL="0">
-              <a:buNone/>
-            </a:pPr>
-            <a:r>
-              <a:rPr lang="en-US" sz="2400" dirty="0">
-                <a:solidFill>
-                  <a:srgbClr val="000000"/>
-                </a:solidFill>
-              </a:rPr>
-              <a:t>🏠</a:t>
-            </a:r>
-            <a:endParaRPr lang="en-US" sz="2400" dirty="0"/>
-          </a:p>
-        </p:txBody>
-      </p:sp>
-      <p:sp>
-        <p:nvSpPr>
-          <p:cNvPr id="26" name="Text 24"/>
-          <p:cNvSpPr/>
-          <p:nvPr/>
-        </p:nvSpPr>
-        <p:spPr>
-          <a:xfrm>
-            <a:off x="6217920" y="3456432"/>
-            <a:ext cx="2606040" cy="320040"/>
-          </a:xfrm>
-          <a:prstGeom prst="rect">
-            <a:avLst/>
-          </a:prstGeom>
-          <a:noFill/>
-          <a:ln/>
-        </p:spPr>
-        <p:txBody>
-          <a:bodyPr wrap="square" lIns="0" tIns="0" rIns="0" bIns="0" rtlCol="0" anchor="ctr"/>
-          <a:lstStyle/>
-          <a:p>
-            <a:pPr algn="ctr" indent="0" marL="0">
-              <a:buNone/>
-            </a:pPr>
-            <a:r>
-              <a:rPr lang="en-US" sz="1200" b="1" dirty="0">
-                <a:solidFill>
-                  <a:srgbClr val="00C9FF"/>
-                </a:solidFill>
-                <a:latin typeface="Calibri" pitchFamily="34" charset="0"/>
-                <a:ea typeface="Calibri" pitchFamily="34" charset="-122"/>
-                <a:cs typeface="Calibri" pitchFamily="34" charset="-120"/>
-              </a:rPr>
-              <a:t>Homeowners &amp; DIY Makers</a:t>
-            </a:r>
-            <a:endParaRPr lang="en-US" sz="1200" dirty="0"/>
-          </a:p>
-        </p:txBody>
-      </p:sp>
-      <p:sp>
-        <p:nvSpPr>
-          <p:cNvPr id="27" name="Text 25"/>
-          <p:cNvSpPr/>
-          <p:nvPr/>
-        </p:nvSpPr>
-        <p:spPr>
-          <a:xfrm>
-            <a:off x="6217920" y="3794760"/>
-            <a:ext cx="2606040" cy="548640"/>
-          </a:xfrm>
-          <a:prstGeom prst="rect">
-            <a:avLst/>
-          </a:prstGeom>
-          <a:noFill/>
-          <a:ln/>
-        </p:spPr>
-        <p:txBody>
-          <a:bodyPr wrap="square" lIns="0" tIns="0" rIns="0" bIns="0" rtlCol="0" anchor="ctr"/>
-          <a:lstStyle/>
-          <a:p>
-            <a:pPr algn="ctr" indent="0" marL="0">
-              <a:buNone/>
-            </a:pPr>
-            <a:r>
-              <a:rPr lang="en-US" sz="1000" dirty="0">
-                <a:solidFill>
-                  <a:srgbClr val="FFFFFF"/>
-                </a:solidFill>
-                <a:latin typeface="Calibri" pitchFamily="34" charset="0"/>
-                <a:ea typeface="Calibri" pitchFamily="34" charset="-122"/>
-                <a:cs typeface="Calibri" pitchFamily="34" charset="-120"/>
-              </a:rPr>
-              <a:t>Affordable Raspberry Pi-based home automation and security</a:t>
-            </a:r>
-            <a:endParaRPr lang="en-US" sz="1000" dirty="0"/>
-          </a:p>
-        </p:txBody>
-      </p:sp>
-    </p:spTree>
-  </p:cSld>
-  <p:clrMapOvr>
-    <a:masterClrMapping/>
-  </p:clrMapOvr>
-</p:sld>
-</file>
-
-<file path=ppt/slides/slide5.xml><?xml version="1.0" encoding="utf-8"?>
-<p:sld xmlns:a="http://schemas.openxmlformats.org/drawingml/2006/main" xmlns:r="http://schemas.openxmlformats.org/officeDocument/2006/relationships" xmlns:p="http://schemas.openxmlformats.org/presentationml/2006/main">
-  <p:cSld name="Slide 5">
-    <p:bg>
-      <p:bgPr>
-        <a:solidFill>
-          <a:srgbClr val="0D1B2A"/>
-        </a:solidFill>
-      </p:bgPr>
-    </p:bg>
-    <p:spTree>
-      <p:nvGrpSpPr>
-        <p:cNvPr id="1" name=""/>
-        <p:cNvGrpSpPr/>
-        <p:nvPr/>
-      </p:nvGrpSpPr>
-      <p:grpSpPr>
-        <a:xfrm>
-          <a:off x="0" y="0"/>
-          <a:ext cx="0" cy="0"/>
-          <a:chOff x="0" y="0"/>
-          <a:chExt cx="0" cy="0"/>
-        </a:xfrm>
-      </p:grpSpPr>
-      <p:sp>
-        <p:nvSpPr>
-          <p:cNvPr id="2" name="Shape 0"/>
-          <p:cNvSpPr/>
-          <p:nvPr/>
-        </p:nvSpPr>
-        <p:spPr>
-          <a:xfrm>
-            <a:off x="0" y="0"/>
-            <a:ext cx="9144000" cy="73152"/>
+            <a:off x="2148840" y="2121408"/>
+            <a:ext cx="274320" cy="54864"/>
           </a:xfrm>
           <a:prstGeom prst="rect">
             <a:avLst/>
@@ -3869,56 +2991,24 @@
             <a:prstDash val="solid"/>
           </a:ln>
         </p:spPr>
-      </p:sp>
-      <p:sp>
-        <p:nvSpPr>
-          <p:cNvPr id="3" name="Text 1"/>
-          <p:cNvSpPr/>
-          <p:nvPr/>
-        </p:nvSpPr>
-        <p:spPr>
-          <a:xfrm>
-            <a:off x="457200" y="228600"/>
-            <a:ext cx="8229600" cy="502920"/>
-          </a:xfrm>
-          <a:prstGeom prst="rect">
-            <a:avLst/>
-          </a:prstGeom>
-          <a:noFill/>
-          <a:ln/>
-        </p:spPr>
-        <p:txBody>
-          <a:bodyPr wrap="square" rtlCol="0" anchor="ctr"/>
-          <a:lstStyle/>
-          <a:p>
-            <a:pPr indent="0" marL="0">
-              <a:buNone/>
-            </a:pPr>
-            <a:r>
-              <a:rPr lang="en-US" sz="2600" b="1" spc="200" kern="0" dirty="0">
-                <a:solidFill>
-                  <a:srgbClr val="FFFFFF"/>
-                </a:solidFill>
-                <a:latin typeface="Arial Black" pitchFamily="34" charset="0"/>
-                <a:ea typeface="Arial Black" pitchFamily="34" charset="-122"/>
-                <a:cs typeface="Arial Black" pitchFamily="34" charset="-120"/>
-              </a:rPr>
-              <a:t>HOW IT WORKS</a:t>
-            </a:r>
-            <a:endParaRPr lang="en-US" sz="2600" dirty="0"/>
-          </a:p>
-        </p:txBody>
-      </p:sp>
-      <p:sp>
-        <p:nvSpPr>
-          <p:cNvPr id="4" name="Shape 2"/>
-          <p:cNvSpPr/>
-          <p:nvPr/>
-        </p:nvSpPr>
-        <p:spPr>
-          <a:xfrm>
-            <a:off x="2148840" y="2121408"/>
-            <a:ext cx="274320" cy="54864"/>
+        <p:txBody>
+          <a:bodyPr/>
+          <a:lstStyle/>
+          <a:p>
+            <a:endParaRPr lang="en-US"/>
+          </a:p>
+        </p:txBody>
+      </p:sp>
+      <p:sp>
+        <p:nvSpPr>
+          <p:cNvPr id="5" name="Shape 3"/>
+          <p:cNvSpPr/>
+          <p:nvPr/>
+        </p:nvSpPr>
+        <p:spPr>
+          <a:xfrm>
+            <a:off x="2386584" y="2057400"/>
+            <a:ext cx="73152" cy="182880"/>
           </a:xfrm>
           <a:prstGeom prst="rect">
             <a:avLst/>
@@ -3933,31 +3023,13 @@
             <a:prstDash val="solid"/>
           </a:ln>
         </p:spPr>
-      </p:sp>
-      <p:sp>
-        <p:nvSpPr>
-          <p:cNvPr id="5" name="Shape 3"/>
-          <p:cNvSpPr/>
-          <p:nvPr/>
-        </p:nvSpPr>
-        <p:spPr>
-          <a:xfrm>
-            <a:off x="2386584" y="2057400"/>
-            <a:ext cx="73152" cy="182880"/>
-          </a:xfrm>
-          <a:prstGeom prst="rect">
-            <a:avLst/>
-          </a:prstGeom>
-          <a:solidFill>
-            <a:srgbClr val="00C9FF"/>
-          </a:solidFill>
-          <a:ln w="12700">
-            <a:solidFill>
-              <a:srgbClr val="00C9FF"/>
-            </a:solidFill>
-            <a:prstDash val="solid"/>
-          </a:ln>
-        </p:spPr>
+        <p:txBody>
+          <a:bodyPr/>
+          <a:lstStyle/>
+          <a:p>
+            <a:endParaRPr lang="en-US"/>
+          </a:p>
+        </p:txBody>
       </p:sp>
       <p:sp>
         <p:nvSpPr>
@@ -3983,13 +3055,20 @@
             <a:prstDash val="solid"/>
           </a:ln>
           <a:effectLst>
-            <a:outerShdw sx="100000" sy="100000" kx="0" ky="0" algn="bl" rotWithShape="0" blurRad="101600" dist="38100" dir="8100000">
+            <a:outerShdw blurRad="101600" dist="38100" dir="8100000" algn="bl" rotWithShape="0">
               <a:srgbClr val="000000">
                 <a:alpha val="20000"/>
               </a:srgbClr>
             </a:outerShdw>
           </a:effectLst>
         </p:spPr>
+        <p:txBody>
+          <a:bodyPr/>
+          <a:lstStyle/>
+          <a:p>
+            <a:endParaRPr lang="en-US"/>
+          </a:p>
+        </p:txBody>
       </p:sp>
       <p:sp>
         <p:nvSpPr>
@@ -4015,6 +3094,13 @@
             <a:prstDash val="solid"/>
           </a:ln>
         </p:spPr>
+        <p:txBody>
+          <a:bodyPr/>
+          <a:lstStyle/>
+          <a:p>
+            <a:endParaRPr lang="en-US"/>
+          </a:p>
+        </p:txBody>
       </p:sp>
       <p:sp>
         <p:nvSpPr>
@@ -4037,7 +3123,7 @@
           <a:bodyPr wrap="square" rtlCol="0" anchor="ctr"/>
           <a:lstStyle/>
           <a:p>
-            <a:pPr algn="ctr" indent="0" marL="0">
+            <a:pPr marL="0" indent="0" algn="ctr">
               <a:buNone/>
             </a:pPr>
             <a:r>
@@ -4076,7 +3162,7 @@
           <a:bodyPr wrap="square" rtlCol="0" anchor="ctr"/>
           <a:lstStyle/>
           <a:p>
-            <a:pPr algn="ctr" indent="0" marL="0">
+            <a:pPr marL="0" indent="0" algn="ctr">
               <a:buNone/>
             </a:pPr>
             <a:r>
@@ -4112,7 +3198,7 @@
           <a:bodyPr wrap="square" lIns="0" tIns="0" rIns="0" bIns="0" rtlCol="0" anchor="ctr"/>
           <a:lstStyle/>
           <a:p>
-            <a:pPr algn="ctr" indent="0" marL="0">
+            <a:pPr marL="0" indent="0" algn="ctr">
               <a:buNone/>
             </a:pPr>
             <a:r>
@@ -4151,7 +3237,7 @@
           <a:bodyPr wrap="square" lIns="0" tIns="0" rIns="0" bIns="0" rtlCol="0" anchor="ctr"/>
           <a:lstStyle/>
           <a:p>
-            <a:pPr algn="ctr" indent="0" marL="0">
+            <a:pPr marL="0" indent="0" algn="ctr">
               <a:buNone/>
             </a:pPr>
             <a:r>
@@ -4193,6 +3279,13 @@
             <a:prstDash val="solid"/>
           </a:ln>
         </p:spPr>
+        <p:txBody>
+          <a:bodyPr/>
+          <a:lstStyle/>
+          <a:p>
+            <a:endParaRPr lang="en-US"/>
+          </a:p>
+        </p:txBody>
       </p:sp>
       <p:sp>
         <p:nvSpPr>
@@ -4218,6 +3311,13 @@
             <a:prstDash val="solid"/>
           </a:ln>
         </p:spPr>
+        <p:txBody>
+          <a:bodyPr/>
+          <a:lstStyle/>
+          <a:p>
+            <a:endParaRPr lang="en-US"/>
+          </a:p>
+        </p:txBody>
       </p:sp>
       <p:sp>
         <p:nvSpPr>
@@ -4243,13 +3343,20 @@
             <a:prstDash val="solid"/>
           </a:ln>
           <a:effectLst>
-            <a:outerShdw sx="100000" sy="100000" kx="0" ky="0" algn="bl" rotWithShape="0" blurRad="101600" dist="38100" dir="8100000">
+            <a:outerShdw blurRad="101600" dist="38100" dir="8100000" algn="bl" rotWithShape="0">
               <a:srgbClr val="000000">
                 <a:alpha val="20000"/>
               </a:srgbClr>
             </a:outerShdw>
           </a:effectLst>
         </p:spPr>
+        <p:txBody>
+          <a:bodyPr/>
+          <a:lstStyle/>
+          <a:p>
+            <a:endParaRPr lang="en-US"/>
+          </a:p>
+        </p:txBody>
       </p:sp>
       <p:sp>
         <p:nvSpPr>
@@ -4275,6 +3382,13 @@
             <a:prstDash val="solid"/>
           </a:ln>
         </p:spPr>
+        <p:txBody>
+          <a:bodyPr/>
+          <a:lstStyle/>
+          <a:p>
+            <a:endParaRPr lang="en-US"/>
+          </a:p>
+        </p:txBody>
       </p:sp>
       <p:sp>
         <p:nvSpPr>
@@ -4297,7 +3411,7 @@
           <a:bodyPr wrap="square" rtlCol="0" anchor="ctr"/>
           <a:lstStyle/>
           <a:p>
-            <a:pPr algn="ctr" indent="0" marL="0">
+            <a:pPr marL="0" indent="0" algn="ctr">
               <a:buNone/>
             </a:pPr>
             <a:r>
@@ -4336,7 +3450,7 @@
           <a:bodyPr wrap="square" rtlCol="0" anchor="ctr"/>
           <a:lstStyle/>
           <a:p>
-            <a:pPr algn="ctr" indent="0" marL="0">
+            <a:pPr marL="0" indent="0" algn="ctr">
               <a:buNone/>
             </a:pPr>
             <a:r>
@@ -4372,7 +3486,7 @@
           <a:bodyPr wrap="square" lIns="0" tIns="0" rIns="0" bIns="0" rtlCol="0" anchor="ctr"/>
           <a:lstStyle/>
           <a:p>
-            <a:pPr algn="ctr" indent="0" marL="0">
+            <a:pPr marL="0" indent="0" algn="ctr">
               <a:buNone/>
             </a:pPr>
             <a:r>
@@ -4384,7 +3498,7 @@
                 <a:ea typeface="Calibri" pitchFamily="34" charset="-122"/>
                 <a:cs typeface="Calibri" pitchFamily="34" charset="-120"/>
               </a:rPr>
-              <a:t>YOLOv8 Inference</a:t>
+              <a:t>YOLOv8 Detection</a:t>
             </a:r>
             <a:endParaRPr lang="en-US" sz="1200" dirty="0"/>
           </a:p>
@@ -4411,7 +3525,7 @@
           <a:bodyPr wrap="square" lIns="0" tIns="0" rIns="0" bIns="0" rtlCol="0" anchor="ctr"/>
           <a:lstStyle/>
           <a:p>
-            <a:pPr algn="ctr" indent="0" marL="0">
+            <a:pPr marL="0" indent="0" algn="ctr">
               <a:buNone/>
             </a:pPr>
             <a:r>
@@ -4453,6 +3567,13 @@
             <a:prstDash val="solid"/>
           </a:ln>
         </p:spPr>
+        <p:txBody>
+          <a:bodyPr/>
+          <a:lstStyle/>
+          <a:p>
+            <a:endParaRPr lang="en-US"/>
+          </a:p>
+        </p:txBody>
       </p:sp>
       <p:sp>
         <p:nvSpPr>
@@ -4478,6 +3599,13 @@
             <a:prstDash val="solid"/>
           </a:ln>
         </p:spPr>
+        <p:txBody>
+          <a:bodyPr/>
+          <a:lstStyle/>
+          <a:p>
+            <a:endParaRPr lang="en-US"/>
+          </a:p>
+        </p:txBody>
       </p:sp>
       <p:sp>
         <p:nvSpPr>
@@ -4503,13 +3631,20 @@
             <a:prstDash val="solid"/>
           </a:ln>
           <a:effectLst>
-            <a:outerShdw sx="100000" sy="100000" kx="0" ky="0" algn="bl" rotWithShape="0" blurRad="101600" dist="38100" dir="8100000">
+            <a:outerShdw blurRad="101600" dist="38100" dir="8100000" algn="bl" rotWithShape="0">
               <a:srgbClr val="000000">
                 <a:alpha val="20000"/>
               </a:srgbClr>
             </a:outerShdw>
           </a:effectLst>
         </p:spPr>
+        <p:txBody>
+          <a:bodyPr/>
+          <a:lstStyle/>
+          <a:p>
+            <a:endParaRPr lang="en-US"/>
+          </a:p>
+        </p:txBody>
       </p:sp>
       <p:sp>
         <p:nvSpPr>
@@ -4535,6 +3670,13 @@
             <a:prstDash val="solid"/>
           </a:ln>
         </p:spPr>
+        <p:txBody>
+          <a:bodyPr/>
+          <a:lstStyle/>
+          <a:p>
+            <a:endParaRPr lang="en-US"/>
+          </a:p>
+        </p:txBody>
       </p:sp>
       <p:sp>
         <p:nvSpPr>
@@ -4557,7 +3699,7 @@
           <a:bodyPr wrap="square" rtlCol="0" anchor="ctr"/>
           <a:lstStyle/>
           <a:p>
-            <a:pPr algn="ctr" indent="0" marL="0">
+            <a:pPr marL="0" indent="0" algn="ctr">
               <a:buNone/>
             </a:pPr>
             <a:r>
@@ -4596,7 +3738,7 @@
           <a:bodyPr wrap="square" rtlCol="0" anchor="ctr"/>
           <a:lstStyle/>
           <a:p>
-            <a:pPr algn="ctr" indent="0" marL="0">
+            <a:pPr marL="0" indent="0" algn="ctr">
               <a:buNone/>
             </a:pPr>
             <a:r>
@@ -4632,7 +3774,7 @@
           <a:bodyPr wrap="square" lIns="0" tIns="0" rIns="0" bIns="0" rtlCol="0" anchor="ctr"/>
           <a:lstStyle/>
           <a:p>
-            <a:pPr algn="ctr" indent="0" marL="0">
+            <a:pPr marL="0" indent="0" algn="ctr">
               <a:buNone/>
             </a:pPr>
             <a:r>
@@ -4644,7 +3786,7 @@
                 <a:ea typeface="Calibri" pitchFamily="34" charset="-122"/>
                 <a:cs typeface="Calibri" pitchFamily="34" charset="-120"/>
               </a:rPr>
-              <a:t>Detection Logic</a:t>
+              <a:t>Context Recording</a:t>
             </a:r>
             <a:endParaRPr lang="en-US" sz="1200" dirty="0"/>
           </a:p>
@@ -4671,7 +3813,7 @@
           <a:bodyPr wrap="square" lIns="0" tIns="0" rIns="0" bIns="0" rtlCol="0" anchor="ctr"/>
           <a:lstStyle/>
           <a:p>
-            <a:pPr algn="ctr" indent="0" marL="0">
+            <a:pPr marL="0" indent="0" algn="ctr">
               <a:buNone/>
             </a:pPr>
             <a:r>
@@ -4683,7 +3825,7 @@
                 <a:ea typeface="Calibri" pitchFamily="34" charset="-122"/>
                 <a:cs typeface="Calibri" pitchFamily="34" charset="-120"/>
               </a:rPr>
-              <a:t>System flags human presence, draws bounding boxes on screen</a:t>
+              <a:t>System creates a JSON with all recognized objects and their locations during the incident</a:t>
             </a:r>
             <a:endParaRPr lang="en-US" sz="1000" dirty="0"/>
           </a:p>
@@ -4713,13 +3855,20 @@
             <a:prstDash val="solid"/>
           </a:ln>
           <a:effectLst>
-            <a:outerShdw sx="100000" sy="100000" kx="0" ky="0" algn="bl" rotWithShape="0" blurRad="101600" dist="38100" dir="8100000">
+            <a:outerShdw blurRad="101600" dist="38100" dir="8100000" algn="bl" rotWithShape="0">
               <a:srgbClr val="000000">
                 <a:alpha val="20000"/>
               </a:srgbClr>
             </a:outerShdw>
           </a:effectLst>
         </p:spPr>
+        <p:txBody>
+          <a:bodyPr/>
+          <a:lstStyle/>
+          <a:p>
+            <a:endParaRPr lang="en-US"/>
+          </a:p>
+        </p:txBody>
       </p:sp>
       <p:sp>
         <p:nvSpPr>
@@ -4745,6 +3894,13 @@
             <a:prstDash val="solid"/>
           </a:ln>
         </p:spPr>
+        <p:txBody>
+          <a:bodyPr/>
+          <a:lstStyle/>
+          <a:p>
+            <a:endParaRPr lang="en-US"/>
+          </a:p>
+        </p:txBody>
       </p:sp>
       <p:sp>
         <p:nvSpPr>
@@ -4767,7 +3923,7 @@
           <a:bodyPr wrap="square" rtlCol="0" anchor="ctr"/>
           <a:lstStyle/>
           <a:p>
-            <a:pPr algn="ctr" indent="0" marL="0">
+            <a:pPr marL="0" indent="0" algn="ctr">
               <a:buNone/>
             </a:pPr>
             <a:r>
@@ -4806,7 +3962,7 @@
           <a:bodyPr wrap="square" rtlCol="0" anchor="ctr"/>
           <a:lstStyle/>
           <a:p>
-            <a:pPr algn="ctr" indent="0" marL="0">
+            <a:pPr marL="0" indent="0" algn="ctr">
               <a:buNone/>
             </a:pPr>
             <a:r>
@@ -4842,7 +3998,7 @@
           <a:bodyPr wrap="square" lIns="0" tIns="0" rIns="0" bIns="0" rtlCol="0" anchor="ctr"/>
           <a:lstStyle/>
           <a:p>
-            <a:pPr algn="ctr" indent="0" marL="0">
+            <a:pPr marL="0" indent="0" algn="ctr">
               <a:buNone/>
             </a:pPr>
             <a:r>
@@ -4854,7 +4010,7 @@
                 <a:ea typeface="Calibri" pitchFamily="34" charset="-122"/>
                 <a:cs typeface="Calibri" pitchFamily="34" charset="-120"/>
               </a:rPr>
-              <a:t>Action Trigger</a:t>
+              <a:t>Incident Detailing</a:t>
             </a:r>
             <a:endParaRPr lang="en-US" sz="1200" dirty="0"/>
           </a:p>
@@ -4881,11 +4037,11 @@
           <a:bodyPr wrap="square" lIns="0" tIns="0" rIns="0" bIns="0" rtlCol="0" anchor="ctr"/>
           <a:lstStyle/>
           <a:p>
-            <a:pPr algn="ctr" indent="0" marL="0">
+            <a:pPr marL="0" indent="0" algn="ctr">
               <a:buNone/>
             </a:pPr>
             <a:r>
-              <a:rPr lang="en-US" sz="1000" dirty="0">
+              <a:rPr lang="en-US" sz="1000" dirty="0" err="1">
                 <a:solidFill>
                   <a:srgbClr val="FFFFFF"/>
                 </a:solidFill>
@@ -4893,7 +4049,18 @@
                 <a:ea typeface="Calibri" pitchFamily="34" charset="-122"/>
                 <a:cs typeface="Calibri" pitchFamily="34" charset="-120"/>
               </a:rPr>
-              <a:t>GPIO pin fires — LED, alarm, or any connected actuator activates</a:t>
+              <a:t>BackBoard</a:t>
+            </a:r>
+            <a:r>
+              <a:rPr lang="en-US" sz="1000" dirty="0">
+                <a:solidFill>
+                  <a:srgbClr val="FFFFFF"/>
+                </a:solidFill>
+                <a:latin typeface="Calibri" pitchFamily="34" charset="0"/>
+                <a:ea typeface="Calibri" pitchFamily="34" charset="-122"/>
+                <a:cs typeface="Calibri" pitchFamily="34" charset="-120"/>
+              </a:rPr>
+              <a:t> analyzes the JSON and storyboards a human-intelligible outline of what happened</a:t>
             </a:r>
             <a:endParaRPr lang="en-US" sz="1000" dirty="0"/>
           </a:p>
@@ -4923,6 +4090,13 @@
             <a:prstDash val="solid"/>
           </a:ln>
         </p:spPr>
+        <p:txBody>
+          <a:bodyPr/>
+          <a:lstStyle/>
+          <a:p>
+            <a:endParaRPr lang="en-US"/>
+          </a:p>
+        </p:txBody>
       </p:sp>
       <p:sp>
         <p:nvSpPr>
@@ -4945,7 +4119,7 @@
           <a:bodyPr wrap="square" rtlCol="0" anchor="ctr"/>
           <a:lstStyle/>
           <a:p>
-            <a:pPr algn="ctr" indent="0" marL="0">
+            <a:pPr marL="0" indent="0" algn="ctr">
               <a:buNone/>
             </a:pPr>
             <a:r>
@@ -4960,742 +4134,6 @@
               <a:t>Tech Stack:   Python 3.8+   ·   YOLOv8n (Ultralytics)   ·   OpenCV   ·   NumPy   ·   Raspberry Pi GPIO</a:t>
             </a:r>
             <a:endParaRPr lang="en-US" sz="1200" dirty="0"/>
-          </a:p>
-        </p:txBody>
-      </p:sp>
-    </p:spTree>
-  </p:cSld>
-  <p:clrMapOvr>
-    <a:masterClrMapping/>
-  </p:clrMapOvr>
-</p:sld>
-</file>
-
-<file path=ppt/slides/slide6.xml><?xml version="1.0" encoding="utf-8"?>
-<p:sld xmlns:a="http://schemas.openxmlformats.org/drawingml/2006/main" xmlns:r="http://schemas.openxmlformats.org/officeDocument/2006/relationships" xmlns:p="http://schemas.openxmlformats.org/presentationml/2006/main">
-  <p:cSld name="Slide 6">
-    <p:bg>
-      <p:bgPr>
-        <a:solidFill>
-          <a:srgbClr val="0D1B2A"/>
-        </a:solidFill>
-      </p:bgPr>
-    </p:bg>
-    <p:spTree>
-      <p:nvGrpSpPr>
-        <p:cNvPr id="1" name=""/>
-        <p:cNvGrpSpPr/>
-        <p:nvPr/>
-      </p:nvGrpSpPr>
-      <p:grpSpPr>
-        <a:xfrm>
-          <a:off x="0" y="0"/>
-          <a:ext cx="0" cy="0"/>
-          <a:chOff x="0" y="0"/>
-          <a:chExt cx="0" cy="0"/>
-        </a:xfrm>
-      </p:grpSpPr>
-      <p:sp>
-        <p:nvSpPr>
-          <p:cNvPr id="2" name="Shape 0"/>
-          <p:cNvSpPr/>
-          <p:nvPr/>
-        </p:nvSpPr>
-        <p:spPr>
-          <a:xfrm>
-            <a:off x="0" y="0"/>
-            <a:ext cx="9144000" cy="73152"/>
-          </a:xfrm>
-          <a:prstGeom prst="rect">
-            <a:avLst/>
-          </a:prstGeom>
-          <a:solidFill>
-            <a:srgbClr val="00C9FF"/>
-          </a:solidFill>
-          <a:ln w="12700">
-            <a:solidFill>
-              <a:srgbClr val="00C9FF"/>
-            </a:solidFill>
-            <a:prstDash val="solid"/>
-          </a:ln>
-        </p:spPr>
-      </p:sp>
-      <p:sp>
-        <p:nvSpPr>
-          <p:cNvPr id="3" name="Shape 1"/>
-          <p:cNvSpPr/>
-          <p:nvPr/>
-        </p:nvSpPr>
-        <p:spPr>
-          <a:xfrm>
-            <a:off x="-914400" y="-457200"/>
-            <a:ext cx="3657600" cy="3657600"/>
-          </a:xfrm>
-          <a:prstGeom prst="ellipse">
-            <a:avLst/>
-          </a:prstGeom>
-          <a:solidFill>
-            <a:srgbClr val="00C9FF">
-              <a:alpha val="10000"/>
-            </a:srgbClr>
-          </a:solidFill>
-          <a:ln w="12700">
-            <a:solidFill>
-              <a:srgbClr val="00C9FF">
-                <a:alpha val="10000"/>
-              </a:srgbClr>
-            </a:solidFill>
-            <a:prstDash val="solid"/>
-          </a:ln>
-        </p:spPr>
-      </p:sp>
-      <p:sp>
-        <p:nvSpPr>
-          <p:cNvPr id="4" name="Shape 2"/>
-          <p:cNvSpPr/>
-          <p:nvPr/>
-        </p:nvSpPr>
-        <p:spPr>
-          <a:xfrm>
-            <a:off x="6400800" y="2286000"/>
-            <a:ext cx="3657600" cy="3657600"/>
-          </a:xfrm>
-          <a:prstGeom prst="ellipse">
-            <a:avLst/>
-          </a:prstGeom>
-          <a:solidFill>
-            <a:srgbClr val="00C9FF">
-              <a:alpha val="10000"/>
-            </a:srgbClr>
-          </a:solidFill>
-          <a:ln w="12700">
-            <a:solidFill>
-              <a:srgbClr val="00C9FF">
-                <a:alpha val="10000"/>
-              </a:srgbClr>
-            </a:solidFill>
-            <a:prstDash val="solid"/>
-          </a:ln>
-        </p:spPr>
-      </p:sp>
-      <p:sp>
-        <p:nvSpPr>
-          <p:cNvPr id="5" name="Text 3"/>
-          <p:cNvSpPr/>
-          <p:nvPr/>
-        </p:nvSpPr>
-        <p:spPr>
-          <a:xfrm>
-            <a:off x="457200" y="731520"/>
-            <a:ext cx="8229600" cy="822960"/>
-          </a:xfrm>
-          <a:prstGeom prst="rect">
-            <a:avLst/>
-          </a:prstGeom>
-          <a:noFill/>
-          <a:ln/>
-        </p:spPr>
-        <p:txBody>
-          <a:bodyPr wrap="square" rtlCol="0" anchor="ctr"/>
-          <a:lstStyle/>
-          <a:p>
-            <a:pPr algn="ctr" indent="0" marL="0">
-              <a:buNone/>
-            </a:pPr>
-            <a:r>
-              <a:rPr lang="en-US" sz="4200" b="1" spc="400" kern="0" dirty="0">
-                <a:solidFill>
-                  <a:srgbClr val="FFFFFF"/>
-                </a:solidFill>
-                <a:latin typeface="Arial Black" pitchFamily="34" charset="0"/>
-                <a:ea typeface="Arial Black" pitchFamily="34" charset="-122"/>
-                <a:cs typeface="Arial Black" pitchFamily="34" charset="-120"/>
-              </a:rPr>
-              <a:t>SMARTER SPACES.</a:t>
-            </a:r>
-            <a:endParaRPr lang="en-US" sz="4200" dirty="0"/>
-          </a:p>
-        </p:txBody>
-      </p:sp>
-      <p:sp>
-        <p:nvSpPr>
-          <p:cNvPr id="6" name="Text 4"/>
-          <p:cNvSpPr/>
-          <p:nvPr/>
-        </p:nvSpPr>
-        <p:spPr>
-          <a:xfrm>
-            <a:off x="457200" y="1508760"/>
-            <a:ext cx="8229600" cy="822960"/>
-          </a:xfrm>
-          <a:prstGeom prst="rect">
-            <a:avLst/>
-          </a:prstGeom>
-          <a:noFill/>
-          <a:ln/>
-        </p:spPr>
-        <p:txBody>
-          <a:bodyPr wrap="square" rtlCol="0" anchor="ctr"/>
-          <a:lstStyle/>
-          <a:p>
-            <a:pPr algn="ctr" indent="0" marL="0">
-              <a:buNone/>
-            </a:pPr>
-            <a:r>
-              <a:rPr lang="en-US" sz="4200" b="1" spc="400" kern="0" dirty="0">
-                <a:solidFill>
-                  <a:srgbClr val="00C9FF"/>
-                </a:solidFill>
-                <a:latin typeface="Arial Black" pitchFamily="34" charset="0"/>
-                <a:ea typeface="Arial Black" pitchFamily="34" charset="-122"/>
-                <a:cs typeface="Arial Black" pitchFamily="34" charset="-120"/>
-              </a:rPr>
-              <a:t>SAFER PEOPLE.</a:t>
-            </a:r>
-            <a:endParaRPr lang="en-US" sz="4200" dirty="0"/>
-          </a:p>
-        </p:txBody>
-      </p:sp>
-      <p:sp>
-        <p:nvSpPr>
-          <p:cNvPr id="7" name="Shape 5"/>
-          <p:cNvSpPr/>
-          <p:nvPr/>
-        </p:nvSpPr>
-        <p:spPr>
-          <a:xfrm>
-            <a:off x="2286000" y="2468880"/>
-            <a:ext cx="4572000" cy="36576"/>
-          </a:xfrm>
-          <a:prstGeom prst="rect">
-            <a:avLst/>
-          </a:prstGeom>
-          <a:solidFill>
-            <a:srgbClr val="00C9FF"/>
-          </a:solidFill>
-          <a:ln w="12700">
-            <a:solidFill>
-              <a:srgbClr val="00C9FF"/>
-            </a:solidFill>
-            <a:prstDash val="solid"/>
-          </a:ln>
-        </p:spPr>
-      </p:sp>
-      <p:sp>
-        <p:nvSpPr>
-          <p:cNvPr id="8" name="Text 6"/>
-          <p:cNvSpPr/>
-          <p:nvPr/>
-        </p:nvSpPr>
-        <p:spPr>
-          <a:xfrm>
-            <a:off x="457200" y="2606040"/>
-            <a:ext cx="8229600" cy="457200"/>
-          </a:xfrm>
-          <a:prstGeom prst="rect">
-            <a:avLst/>
-          </a:prstGeom>
-          <a:noFill/>
-          <a:ln/>
-        </p:spPr>
-        <p:txBody>
-          <a:bodyPr wrap="square" rtlCol="0" anchor="ctr"/>
-          <a:lstStyle/>
-          <a:p>
-            <a:pPr algn="ctr" indent="0" marL="0">
-              <a:buNone/>
-            </a:pPr>
-            <a:r>
-              <a:rPr lang="en-US" sz="1400" i="1" dirty="0">
-                <a:solidFill>
-                  <a:srgbClr val="E0F7FA"/>
-                </a:solidFill>
-                <a:latin typeface="Calibri" pitchFamily="34" charset="0"/>
-                <a:ea typeface="Calibri" pitchFamily="34" charset="-122"/>
-                <a:cs typeface="Calibri" pitchFamily="34" charset="-120"/>
-              </a:rPr>
-              <a:t>Real-time human detection. Plug in a camera. Protect what matters.</a:t>
-            </a:r>
-            <a:endParaRPr lang="en-US" sz="1400" dirty="0"/>
-          </a:p>
-        </p:txBody>
-      </p:sp>
-      <p:sp>
-        <p:nvSpPr>
-          <p:cNvPr id="9" name="Shape 7"/>
-          <p:cNvSpPr/>
-          <p:nvPr/>
-        </p:nvSpPr>
-        <p:spPr>
-          <a:xfrm>
-            <a:off x="457200" y="3246120"/>
-            <a:ext cx="1920240" cy="1188720"/>
-          </a:xfrm>
-          <a:prstGeom prst="rect">
-            <a:avLst/>
-          </a:prstGeom>
-          <a:solidFill>
-            <a:srgbClr val="1A2E42"/>
-          </a:solidFill>
-          <a:ln w="10160">
-            <a:solidFill>
-              <a:srgbClr val="00C9FF"/>
-            </a:solidFill>
-            <a:prstDash val="solid"/>
-          </a:ln>
-          <a:effectLst>
-            <a:outerShdw sx="100000" sy="100000" kx="0" ky="0" algn="bl" rotWithShape="0" blurRad="101600" dist="38100" dir="8100000">
-              <a:srgbClr val="000000">
-                <a:alpha val="20000"/>
-              </a:srgbClr>
-            </a:outerShdw>
-          </a:effectLst>
-        </p:spPr>
-      </p:sp>
-      <p:sp>
-        <p:nvSpPr>
-          <p:cNvPr id="10" name="Text 8"/>
-          <p:cNvSpPr/>
-          <p:nvPr/>
-        </p:nvSpPr>
-        <p:spPr>
-          <a:xfrm>
-            <a:off x="502920" y="3291840"/>
-            <a:ext cx="1828800" cy="594360"/>
-          </a:xfrm>
-          <a:prstGeom prst="rect">
-            <a:avLst/>
-          </a:prstGeom>
-          <a:noFill/>
-          <a:ln/>
-        </p:spPr>
-        <p:txBody>
-          <a:bodyPr wrap="square" rtlCol="0" anchor="ctr"/>
-          <a:lstStyle/>
-          <a:p>
-            <a:pPr algn="ctr" indent="0" marL="0">
-              <a:buNone/>
-            </a:pPr>
-            <a:r>
-              <a:rPr lang="en-US" sz="2200" b="1" dirty="0">
-                <a:solidFill>
-                  <a:srgbClr val="00C9FF"/>
-                </a:solidFill>
-                <a:latin typeface="Arial Black" pitchFamily="34" charset="0"/>
-                <a:ea typeface="Arial Black" pitchFamily="34" charset="-122"/>
-                <a:cs typeface="Arial Black" pitchFamily="34" charset="-120"/>
-              </a:rPr>
-              <a:t>~30 FPS</a:t>
-            </a:r>
-            <a:endParaRPr lang="en-US" sz="2200" dirty="0"/>
-          </a:p>
-        </p:txBody>
-      </p:sp>
-      <p:sp>
-        <p:nvSpPr>
-          <p:cNvPr id="11" name="Text 9"/>
-          <p:cNvSpPr/>
-          <p:nvPr/>
-        </p:nvSpPr>
-        <p:spPr>
-          <a:xfrm>
-            <a:off x="502920" y="3840480"/>
-            <a:ext cx="1828800" cy="320040"/>
-          </a:xfrm>
-          <a:prstGeom prst="rect">
-            <a:avLst/>
-          </a:prstGeom>
-          <a:noFill/>
-          <a:ln/>
-        </p:spPr>
-        <p:txBody>
-          <a:bodyPr wrap="square" lIns="0" tIns="0" rIns="0" bIns="0" rtlCol="0" anchor="ctr"/>
-          <a:lstStyle/>
-          <a:p>
-            <a:pPr algn="ctr" indent="0" marL="0">
-              <a:buNone/>
-            </a:pPr>
-            <a:r>
-              <a:rPr lang="en-US" sz="1000" dirty="0">
-                <a:solidFill>
-                  <a:srgbClr val="FFFFFF"/>
-                </a:solidFill>
-                <a:latin typeface="Calibri" pitchFamily="34" charset="0"/>
-                <a:ea typeface="Calibri" pitchFamily="34" charset="-122"/>
-                <a:cs typeface="Calibri" pitchFamily="34" charset="-120"/>
-              </a:rPr>
-              <a:t>Real-Time Speed</a:t>
-            </a:r>
-            <a:endParaRPr lang="en-US" sz="1000" dirty="0"/>
-          </a:p>
-        </p:txBody>
-      </p:sp>
-      <p:sp>
-        <p:nvSpPr>
-          <p:cNvPr id="12" name="Shape 10"/>
-          <p:cNvSpPr/>
-          <p:nvPr/>
-        </p:nvSpPr>
-        <p:spPr>
-          <a:xfrm>
-            <a:off x="2560320" y="3246120"/>
-            <a:ext cx="1920240" cy="1188720"/>
-          </a:xfrm>
-          <a:prstGeom prst="rect">
-            <a:avLst/>
-          </a:prstGeom>
-          <a:solidFill>
-            <a:srgbClr val="1A2E42"/>
-          </a:solidFill>
-          <a:ln w="10160">
-            <a:solidFill>
-              <a:srgbClr val="00C9FF"/>
-            </a:solidFill>
-            <a:prstDash val="solid"/>
-          </a:ln>
-          <a:effectLst>
-            <a:outerShdw sx="100000" sy="100000" kx="0" ky="0" algn="bl" rotWithShape="0" blurRad="101600" dist="38100" dir="8100000">
-              <a:srgbClr val="000000">
-                <a:alpha val="20000"/>
-              </a:srgbClr>
-            </a:outerShdw>
-          </a:effectLst>
-        </p:spPr>
-      </p:sp>
-      <p:sp>
-        <p:nvSpPr>
-          <p:cNvPr id="13" name="Text 11"/>
-          <p:cNvSpPr/>
-          <p:nvPr/>
-        </p:nvSpPr>
-        <p:spPr>
-          <a:xfrm>
-            <a:off x="2606040" y="3291840"/>
-            <a:ext cx="1828800" cy="594360"/>
-          </a:xfrm>
-          <a:prstGeom prst="rect">
-            <a:avLst/>
-          </a:prstGeom>
-          <a:noFill/>
-          <a:ln/>
-        </p:spPr>
-        <p:txBody>
-          <a:bodyPr wrap="square" rtlCol="0" anchor="ctr"/>
-          <a:lstStyle/>
-          <a:p>
-            <a:pPr algn="ctr" indent="0" marL="0">
-              <a:buNone/>
-            </a:pPr>
-            <a:r>
-              <a:rPr lang="en-US" sz="2200" b="1" dirty="0">
-                <a:solidFill>
-                  <a:srgbClr val="00C9FF"/>
-                </a:solidFill>
-                <a:latin typeface="Arial Black" pitchFamily="34" charset="0"/>
-                <a:ea typeface="Arial Black" pitchFamily="34" charset="-122"/>
-                <a:cs typeface="Arial Black" pitchFamily="34" charset="-120"/>
-              </a:rPr>
-              <a:t>&lt;50ms</a:t>
-            </a:r>
-            <a:endParaRPr lang="en-US" sz="2200" dirty="0"/>
-          </a:p>
-        </p:txBody>
-      </p:sp>
-      <p:sp>
-        <p:nvSpPr>
-          <p:cNvPr id="14" name="Text 12"/>
-          <p:cNvSpPr/>
-          <p:nvPr/>
-        </p:nvSpPr>
-        <p:spPr>
-          <a:xfrm>
-            <a:off x="2606040" y="3840480"/>
-            <a:ext cx="1828800" cy="320040"/>
-          </a:xfrm>
-          <a:prstGeom prst="rect">
-            <a:avLst/>
-          </a:prstGeom>
-          <a:noFill/>
-          <a:ln/>
-        </p:spPr>
-        <p:txBody>
-          <a:bodyPr wrap="square" lIns="0" tIns="0" rIns="0" bIns="0" rtlCol="0" anchor="ctr"/>
-          <a:lstStyle/>
-          <a:p>
-            <a:pPr algn="ctr" indent="0" marL="0">
-              <a:buNone/>
-            </a:pPr>
-            <a:r>
-              <a:rPr lang="en-US" sz="1000" dirty="0">
-                <a:solidFill>
-                  <a:srgbClr val="FFFFFF"/>
-                </a:solidFill>
-                <a:latin typeface="Calibri" pitchFamily="34" charset="0"/>
-                <a:ea typeface="Calibri" pitchFamily="34" charset="-122"/>
-                <a:cs typeface="Calibri" pitchFamily="34" charset="-120"/>
-              </a:rPr>
-              <a:t>Detection Latency</a:t>
-            </a:r>
-            <a:endParaRPr lang="en-US" sz="1000" dirty="0"/>
-          </a:p>
-        </p:txBody>
-      </p:sp>
-      <p:sp>
-        <p:nvSpPr>
-          <p:cNvPr id="15" name="Shape 13"/>
-          <p:cNvSpPr/>
-          <p:nvPr/>
-        </p:nvSpPr>
-        <p:spPr>
-          <a:xfrm>
-            <a:off x="4663440" y="3246120"/>
-            <a:ext cx="1920240" cy="1188720"/>
-          </a:xfrm>
-          <a:prstGeom prst="rect">
-            <a:avLst/>
-          </a:prstGeom>
-          <a:solidFill>
-            <a:srgbClr val="1A2E42"/>
-          </a:solidFill>
-          <a:ln w="10160">
-            <a:solidFill>
-              <a:srgbClr val="00C9FF"/>
-            </a:solidFill>
-            <a:prstDash val="solid"/>
-          </a:ln>
-          <a:effectLst>
-            <a:outerShdw sx="100000" sy="100000" kx="0" ky="0" algn="bl" rotWithShape="0" blurRad="101600" dist="38100" dir="8100000">
-              <a:srgbClr val="000000">
-                <a:alpha val="20000"/>
-              </a:srgbClr>
-            </a:outerShdw>
-          </a:effectLst>
-        </p:spPr>
-      </p:sp>
-      <p:sp>
-        <p:nvSpPr>
-          <p:cNvPr id="16" name="Text 14"/>
-          <p:cNvSpPr/>
-          <p:nvPr/>
-        </p:nvSpPr>
-        <p:spPr>
-          <a:xfrm>
-            <a:off x="4709160" y="3291840"/>
-            <a:ext cx="1828800" cy="594360"/>
-          </a:xfrm>
-          <a:prstGeom prst="rect">
-            <a:avLst/>
-          </a:prstGeom>
-          <a:noFill/>
-          <a:ln/>
-        </p:spPr>
-        <p:txBody>
-          <a:bodyPr wrap="square" rtlCol="0" anchor="ctr"/>
-          <a:lstStyle/>
-          <a:p>
-            <a:pPr algn="ctr" indent="0" marL="0">
-              <a:buNone/>
-            </a:pPr>
-            <a:r>
-              <a:rPr lang="en-US" sz="2200" b="1" dirty="0">
-                <a:solidFill>
-                  <a:srgbClr val="00C9FF"/>
-                </a:solidFill>
-                <a:latin typeface="Arial Black" pitchFamily="34" charset="0"/>
-                <a:ea typeface="Arial Black" pitchFamily="34" charset="-122"/>
-                <a:cs typeface="Arial Black" pitchFamily="34" charset="-120"/>
-              </a:rPr>
-              <a:t>$35</a:t>
-            </a:r>
-            <a:endParaRPr lang="en-US" sz="2200" dirty="0"/>
-          </a:p>
-        </p:txBody>
-      </p:sp>
-      <p:sp>
-        <p:nvSpPr>
-          <p:cNvPr id="17" name="Text 15"/>
-          <p:cNvSpPr/>
-          <p:nvPr/>
-        </p:nvSpPr>
-        <p:spPr>
-          <a:xfrm>
-            <a:off x="4709160" y="3840480"/>
-            <a:ext cx="1828800" cy="320040"/>
-          </a:xfrm>
-          <a:prstGeom prst="rect">
-            <a:avLst/>
-          </a:prstGeom>
-          <a:noFill/>
-          <a:ln/>
-        </p:spPr>
-        <p:txBody>
-          <a:bodyPr wrap="square" lIns="0" tIns="0" rIns="0" bIns="0" rtlCol="0" anchor="ctr"/>
-          <a:lstStyle/>
-          <a:p>
-            <a:pPr algn="ctr" indent="0" marL="0">
-              <a:buNone/>
-            </a:pPr>
-            <a:r>
-              <a:rPr lang="en-US" sz="1000" dirty="0">
-                <a:solidFill>
-                  <a:srgbClr val="FFFFFF"/>
-                </a:solidFill>
-                <a:latin typeface="Calibri" pitchFamily="34" charset="0"/>
-                <a:ea typeface="Calibri" pitchFamily="34" charset="-122"/>
-                <a:cs typeface="Calibri" pitchFamily="34" charset="-120"/>
-              </a:rPr>
-              <a:t>Min. Hardware Cost</a:t>
-            </a:r>
-            <a:endParaRPr lang="en-US" sz="1000" dirty="0"/>
-          </a:p>
-        </p:txBody>
-      </p:sp>
-      <p:sp>
-        <p:nvSpPr>
-          <p:cNvPr id="18" name="Shape 16"/>
-          <p:cNvSpPr/>
-          <p:nvPr/>
-        </p:nvSpPr>
-        <p:spPr>
-          <a:xfrm>
-            <a:off x="6766560" y="3246120"/>
-            <a:ext cx="1920240" cy="1188720"/>
-          </a:xfrm>
-          <a:prstGeom prst="rect">
-            <a:avLst/>
-          </a:prstGeom>
-          <a:solidFill>
-            <a:srgbClr val="1A2E42"/>
-          </a:solidFill>
-          <a:ln w="10160">
-            <a:solidFill>
-              <a:srgbClr val="00C9FF"/>
-            </a:solidFill>
-            <a:prstDash val="solid"/>
-          </a:ln>
-          <a:effectLst>
-            <a:outerShdw sx="100000" sy="100000" kx="0" ky="0" algn="bl" rotWithShape="0" blurRad="101600" dist="38100" dir="8100000">
-              <a:srgbClr val="000000">
-                <a:alpha val="20000"/>
-              </a:srgbClr>
-            </a:outerShdw>
-          </a:effectLst>
-        </p:spPr>
-      </p:sp>
-      <p:sp>
-        <p:nvSpPr>
-          <p:cNvPr id="19" name="Text 17"/>
-          <p:cNvSpPr/>
-          <p:nvPr/>
-        </p:nvSpPr>
-        <p:spPr>
-          <a:xfrm>
-            <a:off x="6812280" y="3291840"/>
-            <a:ext cx="1828800" cy="594360"/>
-          </a:xfrm>
-          <a:prstGeom prst="rect">
-            <a:avLst/>
-          </a:prstGeom>
-          <a:noFill/>
-          <a:ln/>
-        </p:spPr>
-        <p:txBody>
-          <a:bodyPr wrap="square" rtlCol="0" anchor="ctr"/>
-          <a:lstStyle/>
-          <a:p>
-            <a:pPr algn="ctr" indent="0" marL="0">
-              <a:buNone/>
-            </a:pPr>
-            <a:r>
-              <a:rPr lang="en-US" sz="2200" b="1" dirty="0">
-                <a:solidFill>
-                  <a:srgbClr val="00C9FF"/>
-                </a:solidFill>
-                <a:latin typeface="Arial Black" pitchFamily="34" charset="0"/>
-                <a:ea typeface="Arial Black" pitchFamily="34" charset="-122"/>
-                <a:cs typeface="Arial Black" pitchFamily="34" charset="-120"/>
-              </a:rPr>
-              <a:t>80+</a:t>
-            </a:r>
-            <a:endParaRPr lang="en-US" sz="2200" dirty="0"/>
-          </a:p>
-        </p:txBody>
-      </p:sp>
-      <p:sp>
-        <p:nvSpPr>
-          <p:cNvPr id="20" name="Text 18"/>
-          <p:cNvSpPr/>
-          <p:nvPr/>
-        </p:nvSpPr>
-        <p:spPr>
-          <a:xfrm>
-            <a:off x="6812280" y="3840480"/>
-            <a:ext cx="1828800" cy="320040"/>
-          </a:xfrm>
-          <a:prstGeom prst="rect">
-            <a:avLst/>
-          </a:prstGeom>
-          <a:noFill/>
-          <a:ln/>
-        </p:spPr>
-        <p:txBody>
-          <a:bodyPr wrap="square" lIns="0" tIns="0" rIns="0" bIns="0" rtlCol="0" anchor="ctr"/>
-          <a:lstStyle/>
-          <a:p>
-            <a:pPr algn="ctr" indent="0" marL="0">
-              <a:buNone/>
-            </a:pPr>
-            <a:r>
-              <a:rPr lang="en-US" sz="1000" dirty="0">
-                <a:solidFill>
-                  <a:srgbClr val="FFFFFF"/>
-                </a:solidFill>
-                <a:latin typeface="Calibri" pitchFamily="34" charset="0"/>
-                <a:ea typeface="Calibri" pitchFamily="34" charset="-122"/>
-                <a:cs typeface="Calibri" pitchFamily="34" charset="-120"/>
-              </a:rPr>
-              <a:t>Detectable Classes</a:t>
-            </a:r>
-            <a:endParaRPr lang="en-US" sz="1000" dirty="0"/>
-          </a:p>
-        </p:txBody>
-      </p:sp>
-      <p:sp>
-        <p:nvSpPr>
-          <p:cNvPr id="21" name="Text 19"/>
-          <p:cNvSpPr/>
-          <p:nvPr/>
-        </p:nvSpPr>
-        <p:spPr>
-          <a:xfrm>
-            <a:off x="457200" y="4663440"/>
-            <a:ext cx="8229600" cy="274320"/>
-          </a:xfrm>
-          <a:prstGeom prst="rect">
-            <a:avLst/>
-          </a:prstGeom>
-          <a:noFill/>
-          <a:ln/>
-        </p:spPr>
-        <p:txBody>
-          <a:bodyPr wrap="square" rtlCol="0" anchor="ctr"/>
-          <a:lstStyle/>
-          <a:p>
-            <a:pPr algn="ctr" indent="0" marL="0">
-              <a:buNone/>
-            </a:pPr>
-            <a:r>
-              <a:rPr lang="en-US" sz="1000" dirty="0">
-                <a:solidFill>
-                  <a:srgbClr val="94A3B8"/>
-                </a:solidFill>
-                <a:latin typeface="Calibri" pitchFamily="34" charset="0"/>
-                <a:ea typeface="Calibri" pitchFamily="34" charset="-122"/>
-                <a:cs typeface="Calibri" pitchFamily="34" charset="-120"/>
-              </a:rPr>
-              <a:t>github.com/Freezescape/CUHackIt  ·  MIT License  ·  Open Source</a:t>
-            </a:r>
-            <a:endParaRPr lang="en-US" sz="1000" dirty="0"/>
           </a:p>
         </p:txBody>
       </p:sp>
@@ -6000,4 +4438,319 @@
     </a:ext>
   </a:extLst>
 </a:theme>
+</file>
+
+<file path=ppt/theme/theme2.xml><?xml version="1.0" encoding="utf-8"?>
+<a:theme xmlns:a="http://schemas.openxmlformats.org/drawingml/2006/main" name="Office Theme">
+  <a:themeElements>
+    <a:clrScheme name="Office">
+      <a:dk1>
+        <a:sysClr val="windowText" lastClr="000000"/>
+      </a:dk1>
+      <a:lt1>
+        <a:sysClr val="window" lastClr="FFFFFF"/>
+      </a:lt1>
+      <a:dk2>
+        <a:srgbClr val="0E2841"/>
+      </a:dk2>
+      <a:lt2>
+        <a:srgbClr val="E8E8E8"/>
+      </a:lt2>
+      <a:accent1>
+        <a:srgbClr val="156082"/>
+      </a:accent1>
+      <a:accent2>
+        <a:srgbClr val="E97132"/>
+      </a:accent2>
+      <a:accent3>
+        <a:srgbClr val="196B24"/>
+      </a:accent3>
+      <a:accent4>
+        <a:srgbClr val="0F9ED5"/>
+      </a:accent4>
+      <a:accent5>
+        <a:srgbClr val="A02B93"/>
+      </a:accent5>
+      <a:accent6>
+        <a:srgbClr val="4EA72E"/>
+      </a:accent6>
+      <a:hlink>
+        <a:srgbClr val="467886"/>
+      </a:hlink>
+      <a:folHlink>
+        <a:srgbClr val="96607D"/>
+      </a:folHlink>
+    </a:clrScheme>
+    <a:fontScheme name="Office">
+      <a:majorFont>
+        <a:latin typeface="Aptos Display" panose="02110004020202020204"/>
+        <a:ea typeface=""/>
+        <a:cs typeface=""/>
+        <a:font script="Jpan" typeface="游ゴシック Light"/>
+        <a:font script="Hang" typeface="맑은 고딕"/>
+        <a:font script="Hans" typeface="等线 Light"/>
+        <a:font script="Hant" typeface="新細明體"/>
+        <a:font script="Arab" typeface="Times New Roman"/>
+        <a:font script="Hebr" typeface="Times New Roman"/>
+        <a:font script="Thai" typeface="Angsana New"/>
+        <a:font script="Ethi" typeface="Nyala"/>
+        <a:font script="Beng" typeface="Vrinda"/>
+        <a:font script="Gujr" typeface="Shruti"/>
+        <a:font script="Khmr" typeface="MoolBoran"/>
+        <a:font script="Knda" typeface="Tunga"/>
+        <a:font script="Guru" typeface="Raavi"/>
+        <a:font script="Cans" typeface="Euphemia"/>
+        <a:font script="Cher" typeface="Plantagenet Cherokee"/>
+        <a:font script="Yiii" typeface="Microsoft Yi Baiti"/>
+        <a:font script="Tibt" typeface="Microsoft Himalaya"/>
+        <a:font script="Thaa" typeface="MV Boli"/>
+        <a:font script="Deva" typeface="Mangal"/>
+        <a:font script="Telu" typeface="Gautami"/>
+        <a:font script="Taml" typeface="Latha"/>
+        <a:font script="Syrc" typeface="Estrangelo Edessa"/>
+        <a:font script="Orya" typeface="Kalinga"/>
+        <a:font script="Mlym" typeface="Kartika"/>
+        <a:font script="Laoo" typeface="DokChampa"/>
+        <a:font script="Sinh" typeface="Iskoola Pota"/>
+        <a:font script="Mong" typeface="Mongolian Baiti"/>
+        <a:font script="Viet" typeface="Times New Roman"/>
+        <a:font script="Uigh" typeface="Microsoft Uighur"/>
+        <a:font script="Geor" typeface="Sylfaen"/>
+        <a:font script="Armn" typeface="Arial"/>
+        <a:font script="Bugi" typeface="Leelawadee UI"/>
+        <a:font script="Bopo" typeface="Microsoft JhengHei"/>
+        <a:font script="Java" typeface="Javanese Text"/>
+        <a:font script="Lisu" typeface="Segoe UI"/>
+        <a:font script="Mymr" typeface="Myanmar Text"/>
+        <a:font script="Nkoo" typeface="Ebrima"/>
+        <a:font script="Olck" typeface="Nirmala UI"/>
+        <a:font script="Osma" typeface="Ebrima"/>
+        <a:font script="Phag" typeface="Phagspa"/>
+        <a:font script="Syrn" typeface="Estrangelo Edessa"/>
+        <a:font script="Syrj" typeface="Estrangelo Edessa"/>
+        <a:font script="Syre" typeface="Estrangelo Edessa"/>
+        <a:font script="Sora" typeface="Nirmala UI"/>
+        <a:font script="Tale" typeface="Microsoft Tai Le"/>
+        <a:font script="Talu" typeface="Microsoft New Tai Lue"/>
+        <a:font script="Tfng" typeface="Ebrima"/>
+      </a:majorFont>
+      <a:minorFont>
+        <a:latin typeface="Aptos" panose="02110004020202020204"/>
+        <a:ea typeface=""/>
+        <a:cs typeface=""/>
+        <a:font script="Jpan" typeface="游ゴシック"/>
+        <a:font script="Hang" typeface="맑은 고딕"/>
+        <a:font script="Hans" typeface="等线"/>
+        <a:font script="Hant" typeface="新細明體"/>
+        <a:font script="Arab" typeface="Arial"/>
+        <a:font script="Hebr" typeface="Arial"/>
+        <a:font script="Thai" typeface="Cordia New"/>
+        <a:font script="Ethi" typeface="Nyala"/>
+        <a:font script="Beng" typeface="Vrinda"/>
+        <a:font script="Gujr" typeface="Shruti"/>
+        <a:font script="Khmr" typeface="DaunPenh"/>
+        <a:font script="Knda" typeface="Tunga"/>
+        <a:font script="Guru" typeface="Raavi"/>
+        <a:font script="Cans" typeface="Euphemia"/>
+        <a:font script="Cher" typeface="Plantagenet Cherokee"/>
+        <a:font script="Yiii" typeface="Microsoft Yi Baiti"/>
+        <a:font script="Tibt" typeface="Microsoft Himalaya"/>
+        <a:font script="Thaa" typeface="MV Boli"/>
+        <a:font script="Deva" typeface="Mangal"/>
+        <a:font script="Telu" typeface="Gautami"/>
+        <a:font script="Taml" typeface="Latha"/>
+        <a:font script="Syrc" typeface="Estrangelo Edessa"/>
+        <a:font script="Orya" typeface="Kalinga"/>
+        <a:font script="Mlym" typeface="Kartika"/>
+        <a:font script="Laoo" typeface="DokChampa"/>
+        <a:font script="Sinh" typeface="Iskoola Pota"/>
+        <a:font script="Mong" typeface="Mongolian Baiti"/>
+        <a:font script="Viet" typeface="Arial"/>
+        <a:font script="Uigh" typeface="Microsoft Uighur"/>
+        <a:font script="Geor" typeface="Sylfaen"/>
+        <a:font script="Armn" typeface="Arial"/>
+        <a:font script="Bugi" typeface="Leelawadee UI"/>
+        <a:font script="Bopo" typeface="Microsoft JhengHei"/>
+        <a:font script="Java" typeface="Javanese Text"/>
+        <a:font script="Lisu" typeface="Segoe UI"/>
+        <a:font script="Mymr" typeface="Myanmar Text"/>
+        <a:font script="Nkoo" typeface="Ebrima"/>
+        <a:font script="Olck" typeface="Nirmala UI"/>
+        <a:font script="Osma" typeface="Ebrima"/>
+        <a:font script="Phag" typeface="Phagspa"/>
+        <a:font script="Syrn" typeface="Estrangelo Edessa"/>
+        <a:font script="Syrj" typeface="Estrangelo Edessa"/>
+        <a:font script="Syre" typeface="Estrangelo Edessa"/>
+        <a:font script="Sora" typeface="Nirmala UI"/>
+        <a:font script="Tale" typeface="Microsoft Tai Le"/>
+        <a:font script="Talu" typeface="Microsoft New Tai Lue"/>
+        <a:font script="Tfng" typeface="Ebrima"/>
+      </a:minorFont>
+    </a:fontScheme>
+    <a:fmtScheme name="Office">
+      <a:fillStyleLst>
+        <a:solidFill>
+          <a:schemeClr val="phClr"/>
+        </a:solidFill>
+        <a:gradFill rotWithShape="1">
+          <a:gsLst>
+            <a:gs pos="0">
+              <a:schemeClr val="phClr">
+                <a:lumMod val="110000"/>
+                <a:satMod val="105000"/>
+                <a:tint val="67000"/>
+              </a:schemeClr>
+            </a:gs>
+            <a:gs pos="50000">
+              <a:schemeClr val="phClr">
+                <a:lumMod val="105000"/>
+                <a:satMod val="103000"/>
+                <a:tint val="73000"/>
+              </a:schemeClr>
+            </a:gs>
+            <a:gs pos="100000">
+              <a:schemeClr val="phClr">
+                <a:lumMod val="105000"/>
+                <a:satMod val="109000"/>
+                <a:tint val="81000"/>
+              </a:schemeClr>
+            </a:gs>
+          </a:gsLst>
+          <a:lin ang="5400000" scaled="0"/>
+        </a:gradFill>
+        <a:gradFill rotWithShape="1">
+          <a:gsLst>
+            <a:gs pos="0">
+              <a:schemeClr val="phClr">
+                <a:satMod val="103000"/>
+                <a:lumMod val="102000"/>
+                <a:tint val="94000"/>
+              </a:schemeClr>
+            </a:gs>
+            <a:gs pos="50000">
+              <a:schemeClr val="phClr">
+                <a:satMod val="110000"/>
+                <a:lumMod val="100000"/>
+                <a:shade val="100000"/>
+              </a:schemeClr>
+            </a:gs>
+            <a:gs pos="100000">
+              <a:schemeClr val="phClr">
+                <a:lumMod val="99000"/>
+                <a:satMod val="120000"/>
+                <a:shade val="78000"/>
+              </a:schemeClr>
+            </a:gs>
+          </a:gsLst>
+          <a:lin ang="5400000" scaled="0"/>
+        </a:gradFill>
+      </a:fillStyleLst>
+      <a:lnStyleLst>
+        <a:ln w="12700" cap="flat" cmpd="sng" algn="ctr">
+          <a:solidFill>
+            <a:schemeClr val="phClr"/>
+          </a:solidFill>
+          <a:prstDash val="solid"/>
+          <a:miter lim="800000"/>
+        </a:ln>
+        <a:ln w="19050" cap="flat" cmpd="sng" algn="ctr">
+          <a:solidFill>
+            <a:schemeClr val="phClr"/>
+          </a:solidFill>
+          <a:prstDash val="solid"/>
+          <a:miter lim="800000"/>
+        </a:ln>
+        <a:ln w="25400" cap="flat" cmpd="sng" algn="ctr">
+          <a:solidFill>
+            <a:schemeClr val="phClr"/>
+          </a:solidFill>
+          <a:prstDash val="solid"/>
+          <a:miter lim="800000"/>
+        </a:ln>
+      </a:lnStyleLst>
+      <a:effectStyleLst>
+        <a:effectStyle>
+          <a:effectLst/>
+        </a:effectStyle>
+        <a:effectStyle>
+          <a:effectLst/>
+        </a:effectStyle>
+        <a:effectStyle>
+          <a:effectLst>
+            <a:outerShdw blurRad="57150" dist="19050" dir="5400000" algn="ctr" rotWithShape="0">
+              <a:srgbClr val="000000">
+                <a:alpha val="63000"/>
+              </a:srgbClr>
+            </a:outerShdw>
+          </a:effectLst>
+        </a:effectStyle>
+      </a:effectStyleLst>
+      <a:bgFillStyleLst>
+        <a:solidFill>
+          <a:schemeClr val="phClr"/>
+        </a:solidFill>
+        <a:solidFill>
+          <a:schemeClr val="phClr">
+            <a:tint val="95000"/>
+            <a:satMod val="170000"/>
+          </a:schemeClr>
+        </a:solidFill>
+        <a:gradFill rotWithShape="1">
+          <a:gsLst>
+            <a:gs pos="0">
+              <a:schemeClr val="phClr">
+                <a:tint val="93000"/>
+                <a:satMod val="150000"/>
+                <a:shade val="98000"/>
+                <a:lumMod val="102000"/>
+              </a:schemeClr>
+            </a:gs>
+            <a:gs pos="50000">
+              <a:schemeClr val="phClr">
+                <a:tint val="98000"/>
+                <a:satMod val="130000"/>
+                <a:shade val="90000"/>
+                <a:lumMod val="103000"/>
+              </a:schemeClr>
+            </a:gs>
+            <a:gs pos="100000">
+              <a:schemeClr val="phClr">
+                <a:shade val="63000"/>
+                <a:satMod val="120000"/>
+              </a:schemeClr>
+            </a:gs>
+          </a:gsLst>
+          <a:lin ang="5400000" scaled="0"/>
+        </a:gradFill>
+      </a:bgFillStyleLst>
+    </a:fmtScheme>
+  </a:themeElements>
+  <a:objectDefaults>
+    <a:lnDef>
+      <a:spPr/>
+      <a:bodyPr/>
+      <a:lstStyle/>
+      <a:style>
+        <a:lnRef idx="2">
+          <a:schemeClr val="accent1"/>
+        </a:lnRef>
+        <a:fillRef idx="0">
+          <a:schemeClr val="accent1"/>
+        </a:fillRef>
+        <a:effectRef idx="1">
+          <a:schemeClr val="accent1"/>
+        </a:effectRef>
+        <a:fontRef idx="minor">
+          <a:schemeClr val="tx1"/>
+        </a:fontRef>
+      </a:style>
+    </a:lnDef>
+  </a:objectDefaults>
+  <a:extraClrSchemeLst/>
+  <a:extLst>
+    <a:ext uri="{05A4C25C-085E-4340-85A3-A5531E510DB2}">
+      <thm15:themeFamily xmlns:thm15="http://schemas.microsoft.com/office/thememl/2012/main" name="Office Theme" id="{2E142A2C-CD16-42D6-873A-C26D2A0506FA}" vid="{1BDDFF52-6CD6-40A5-AB3C-68EB2F1E4D0A}"/>
+    </a:ext>
+  </a:extLst>
+</a:theme>
 </file>